--- a/public/templates/000_pm_suite/01_프로젝트 관리/01_통합관리/문서관리_계획서_템플릿.pptx
+++ b/public/templates/000_pm_suite/01_프로젝트 관리/01_통합관리/문서관리_계획서_템플릿.pptx
@@ -3265,7 +3265,7 @@
                 </a:solidFill>
                 <a:latin typeface="맑은 고딕"/>
               </a:rPr>
-              <a:t>산출물 ID : GRV_MAN_070   |   버전 : v1.0   |   표준 관리 템플릿</a:t>
+              <a:t>산출물 ID : EMP_MAN_070   |   버전 : v1.0   |   표준 관리 템플릿</a:t>
             </a:r>
           </a:p>
         </p:txBody>
@@ -3350,7 +3350,7 @@
                 </a:solidFill>
                 <a:latin typeface="맑은 고딕"/>
               </a:rPr>
-              <a:t>아모레퍼시픽 Claimworks-Claims AI 시스템 구축</a:t>
+              <a:t>한빛글로벌 SyncGuard AI 시스템 구축</a:t>
             </a:r>
           </a:p>
         </p:txBody>
@@ -3574,7 +3574,7 @@
                           </a:solidFill>
                           <a:latin typeface="맑은 고딕"/>
                         </a:rPr>
-                        <a:t>아모레퍼시픽 Claimworks-Claims AI 시스템 구축 용역</a:t>
+                        <a:t>한빛글로벌 SyncGuard AI 시스템 구축 용역</a:t>
                       </a:r>
                     </a:p>
                   </a:txBody>
@@ -3778,7 +3778,7 @@
                           </a:solidFill>
                           <a:latin typeface="맑은 고딕"/>
                         </a:rPr>
-                        <a:t>주식회사 아모레퍼시픽 (연구전략Lab / ERP플랫폼기획팀 / RA Lab)</a:t>
+                        <a:t>주식회사 한빛글로벌 (연구전략Lab / ERP플랫폼기획팀 / RA Lab)</a:t>
                       </a:r>
                     </a:p>
                   </a:txBody>
@@ -3880,7 +3880,7 @@
                           </a:solidFill>
                           <a:latin typeface="맑은 고딕"/>
                         </a:rPr>
-                        <a:t>주식회사 그로브소프트 (협력사: ㈜아이시프트)</a:t>
+                        <a:t>주식회사 엠파시 (협력사: ㈜데이터브릿지)</a:t>
                       </a:r>
                     </a:p>
                   </a:txBody>
@@ -4153,7 +4153,7 @@
                           </a:solidFill>
                           <a:latin typeface="맑은 고딕"/>
                         </a:rPr>
-                        <a:t>수행사 (그로브)</a:t>
+                        <a:t>수행사 (엠파시)</a:t>
                       </a:r>
                     </a:p>
                   </a:txBody>
@@ -4203,7 +4203,7 @@
                           </a:solidFill>
                           <a:latin typeface="맑은 고딕"/>
                         </a:rPr>
-                        <a:t>발주사 (아모레)</a:t>
+                        <a:t>발주사 (한빛글로벌)</a:t>
                       </a:r>
                     </a:p>
                   </a:txBody>
@@ -4305,7 +4305,7 @@
                           </a:solidFill>
                           <a:latin typeface="맑은 고딕"/>
                         </a:rPr>
-                        <a:t>김재은 PM</a:t>
+                        <a:t>김태윤 PM</a:t>
                       </a:r>
                     </a:p>
                   </a:txBody>
@@ -4355,7 +4355,7 @@
                           </a:solidFill>
                           <a:latin typeface="맑은 고딕"/>
                         </a:rPr>
-                        <a:t>박주열 PM</a:t>
+                        <a:t>정민수 PM</a:t>
                       </a:r>
                     </a:p>
                   </a:txBody>
@@ -4457,7 +4457,7 @@
                           </a:solidFill>
                           <a:latin typeface="맑은 고딕"/>
                         </a:rPr>
-                        <a:t>오병문 AA</a:t>
+                        <a:t>박준혁 AA</a:t>
                       </a:r>
                     </a:p>
                   </a:txBody>
@@ -4507,7 +4507,7 @@
                           </a:solidFill>
                           <a:latin typeface="맑은 고딕"/>
                         </a:rPr>
-                        <a:t>김경호 PM</a:t>
+                        <a:t>한승우 PM</a:t>
                       </a:r>
                     </a:p>
                   </a:txBody>
@@ -4913,7 +4913,7 @@
                 </a:solidFill>
                 <a:latin typeface="맑은 고딕"/>
               </a:rPr>
-              <a:t>• 본 문서는 전사 표준 프로젝트 관리 템플릿이자 아모레퍼시픽 Claim AI 실전 기준서입니다.</a:t>
+              <a:t>• 본 문서는 전사 표준 프로젝트 관리 템플릿이자 한빛글로벌 SyncGuard AI 실전 기준서입니다.</a:t>
             </a:r>
           </a:p>
           <a:p>
@@ -5053,7 +5053,7 @@
                 </a:solidFill>
                 <a:latin typeface="맑은 고딕"/>
               </a:rPr>
-              <a:t>산출물 ID : GRV_MAN_070  |  버전 : v1.0</a:t>
+              <a:t>산출물 ID : EMP_MAN_070  |  버전 : v1.0</a:t>
             </a:r>
           </a:p>
         </p:txBody>
@@ -5265,7 +5265,7 @@
                 </a:solidFill>
                 <a:latin typeface="맑은 고딕"/>
               </a:rPr>
-              <a:t>아모레퍼시픽 Claimworks-Claims AI 시스템 구축  |  문서관리 계획서</a:t>
+              <a:t>한빛글로벌 SyncGuard AI 시스템 구축  |  문서관리 계획서</a:t>
             </a:r>
           </a:p>
         </p:txBody>
@@ -5349,7 +5349,7 @@
                 </a:solidFill>
                 <a:latin typeface="맑은 고딕"/>
               </a:rPr>
-              <a:t>발주사 : AMOREPACIFIC   |   수행사 : ㈜그로브소프트 (GROVE)</a:t>
+              <a:t>발주사 : HANBIT GLOBAL   |   수행사 : ㈜엠파시 (Empasy Inc.)</a:t>
             </a:r>
           </a:p>
         </p:txBody>
@@ -5803,7 +5803,7 @@
                           </a:solidFill>
                           <a:latin typeface="맑은 고딕"/>
                         </a:rPr>
-                        <a:t>산출물 파일명 및 문서 ID가 전사 명명 규칙(GRV_[단계]_[번호])을 준수하였는가?</a:t>
+                        <a:t>산출물 파일명 및 문서 ID가 전사 명명 규칙(EMP_[단계]_[번호])을 준수하였는가?</a:t>
                       </a:r>
                     </a:p>
                   </a:txBody>
@@ -8329,7 +8329,7 @@
                 </a:solidFill>
                 <a:latin typeface="맑은 고딕"/>
               </a:rPr>
-              <a:t>산출물 ID : GRV_MAN_070  |  버전 : v1.0</a:t>
+              <a:t>산출물 ID : EMP_MAN_070  |  버전 : v1.0</a:t>
             </a:r>
           </a:p>
         </p:txBody>
@@ -8541,7 +8541,7 @@
                 </a:solidFill>
                 <a:latin typeface="맑은 고딕"/>
               </a:rPr>
-              <a:t>아모레퍼시픽 Claimworks-Claims AI 시스템 구축  |  문서관리 계획서</a:t>
+              <a:t>한빛글로벌 SyncGuard AI 시스템 구축  |  문서관리 계획서</a:t>
             </a:r>
           </a:p>
         </p:txBody>
@@ -8625,7 +8625,7 @@
                 </a:solidFill>
                 <a:latin typeface="맑은 고딕"/>
               </a:rPr>
-              <a:t>발주사 : AMOREPACIFIC   |   수행사 : ㈜그로브소프트 (GROVE)</a:t>
+              <a:t>발주사 : HANBIT GLOBAL   |   수행사 : ㈜엠파시 (Empasy Inc.)</a:t>
             </a:r>
           </a:p>
         </p:txBody>
@@ -9170,7 +9170,7 @@
                           </a:solidFill>
                           <a:latin typeface="맑은 고딕"/>
                         </a:rPr>
-                        <a:t>황자영 PMO</a:t>
+                        <a:t>이지훈 PMO</a:t>
                       </a:r>
                     </a:p>
                   </a:txBody>
@@ -9422,7 +9422,7 @@
                           </a:solidFill>
                           <a:latin typeface="맑은 고딕"/>
                         </a:rPr>
-                        <a:t>김재은 / 박주열</a:t>
+                        <a:t>김태윤 / 정민수</a:t>
                       </a:r>
                     </a:p>
                   </a:txBody>
@@ -9674,7 +9674,7 @@
                           </a:solidFill>
                           <a:latin typeface="맑은 고딕"/>
                         </a:rPr>
-                        <a:t>오병문 AA</a:t>
+                        <a:t>박준혁 AA</a:t>
                       </a:r>
                     </a:p>
                   </a:txBody>
@@ -9966,7 +9966,7 @@
                 </a:solidFill>
                 <a:latin typeface="맑은 고딕"/>
               </a:rPr>
-              <a:t>3. 교체 필수 항목 : [사업명], [발주사/수행사 조직], [사업기간 및 M1~M6 일정], [산출물 ID 체계], [인력/인프라 수량]</a:t>
+              <a:t>3. 교체 필수 항목 : SyncGuard AI 시스템 구축 사업, [발주사/수행사 조직], [사업기간 및 M1~M6 일정], [산출물 ID 체계], [인력/인프라 수량]</a:t>
             </a:r>
           </a:p>
           <a:p>
@@ -9985,7 +9985,7 @@
                 </a:solidFill>
                 <a:latin typeface="맑은 고딕"/>
               </a:rPr>
-              <a:t>4. 연계 문서 : 사업수행계획서(GRV_INT_010), WBS(GRV_INT_020), 주간보고서(GRV_MAN_010), 투입공수(GRV_MAN_050)</a:t>
+              <a:t>4. 연계 문서 : 사업수행계획서(EMP_INT_010), WBS(EMP_INT_020), 주간보고서(EMP_MAN_010), 투입공수(EMP_MAN_050)</a:t>
             </a:r>
           </a:p>
         </p:txBody>
@@ -12177,7 +12177,7 @@
                 </a:solidFill>
                 <a:latin typeface="맑은 고딕"/>
               </a:rPr>
-              <a:t>산출물 ID : GRV_MAN_070  |  버전 : v1.0</a:t>
+              <a:t>산출물 ID : EMP_MAN_070  |  버전 : v1.0</a:t>
             </a:r>
           </a:p>
         </p:txBody>
@@ -12389,7 +12389,7 @@
                 </a:solidFill>
                 <a:latin typeface="맑은 고딕"/>
               </a:rPr>
-              <a:t>아모레퍼시픽 Claimworks-Claims AI 시스템 구축  |  문서관리 계획서</a:t>
+              <a:t>한빛글로벌 SyncGuard AI 시스템 구축  |  문서관리 계획서</a:t>
             </a:r>
           </a:p>
         </p:txBody>
@@ -12473,7 +12473,7 @@
                 </a:solidFill>
                 <a:latin typeface="맑은 고딕"/>
               </a:rPr>
-              <a:t>발주사 : AMOREPACIFIC   |   수행사 : ㈜그로브소프트 (GROVE)</a:t>
+              <a:t>발주사 : HANBIT GLOBAL   |   수행사 : ㈜엠파시 (Empasy Inc.)</a:t>
             </a:r>
           </a:p>
         </p:txBody>
@@ -12978,7 +12978,7 @@
                 </a:solidFill>
                 <a:latin typeface="맑은 고딕"/>
               </a:rPr>
-              <a:t>• 표준용어정의서(GRV_DEG_060) 및 코드정의서(GRV_DEG_070)에 등록된 공식 도메인 용어만 사용</a:t>
+              <a:t>• 표준용어정의서(EMP_DEG_060) 및 코드정의서(EMP_DEG_070)에 등록된 공식 도메인 용어만 사용</a:t>
             </a:r>
           </a:p>
           <a:p>
@@ -13240,7 +13240,7 @@
                 </a:solidFill>
                 <a:latin typeface="맑은 고딕"/>
               </a:rPr>
-              <a:t>• 요구사항추적표(GRV_ANL_030, RTVM)를 통해 미반영 요구사항이나 고아 기능(Orphan) 발생 여부를 상시 검증</a:t>
+              <a:t>• 요구사항추적표(EMP_ANL_030, RTVM)를 통해 미반영 요구사항이나 고아 기능(Orphan) 발생 여부를 상시 검증</a:t>
             </a:r>
           </a:p>
           <a:p>
@@ -13521,7 +13521,7 @@
                 </a:solidFill>
                 <a:latin typeface="맑은 고딕"/>
               </a:rPr>
-              <a:t>• 사업 종료 시 인수인계계획서(GRV_IMP_030) 및 검수확인서(GRV_IMP_040)에 의거 발주사에 전수 인계</a:t>
+              <a:t>• 사업 종료 시 인수인계계획서(EMP_IMP_030) 및 검수확인서(EMP_IMP_040)에 의거 발주사에 전수 인계</a:t>
             </a:r>
           </a:p>
         </p:txBody>
@@ -13753,7 +13753,7 @@
                 </a:solidFill>
                 <a:latin typeface="맑은 고딕"/>
               </a:rPr>
-              <a:t>산출물 ID : GRV_MAN_070  |  버전 : v1.0</a:t>
+              <a:t>산출물 ID : EMP_MAN_070  |  버전 : v1.0</a:t>
             </a:r>
           </a:p>
         </p:txBody>
@@ -13965,7 +13965,7 @@
                 </a:solidFill>
                 <a:latin typeface="맑은 고딕"/>
               </a:rPr>
-              <a:t>아모레퍼시픽 Claimworks-Claims AI 시스템 구축  |  문서관리 계획서</a:t>
+              <a:t>한빛글로벌 SyncGuard AI 시스템 구축  |  문서관리 계획서</a:t>
             </a:r>
           </a:p>
         </p:txBody>
@@ -14049,7 +14049,7 @@
                 </a:solidFill>
                 <a:latin typeface="맑은 고딕"/>
               </a:rPr>
-              <a:t>발주사 : AMOREPACIFIC   |   수행사 : ㈜그로브소프트 (GROVE)</a:t>
+              <a:t>발주사 : HANBIT GLOBAL   |   수행사 : ㈜엠파시 (Empasy Inc.)</a:t>
             </a:r>
           </a:p>
         </p:txBody>
@@ -14273,7 +14273,7 @@
                 </a:solidFill>
                 <a:latin typeface="맑은 고딕"/>
               </a:rPr>
-              <a:t>• 작성 예시 (설계 단계) :  GRV_DEG_090_Claimworks-Claims AI_아키텍처정의서_v1.3.docx     |     (착수 단계) :  GRV_INT_020_Claimworks-Claims AI_작업분할구조도(WBS)_v1.1_20261026.xlsx</a:t>
+              <a:t>• 작성 예시 (설계 단계) :  EMP_DEG_090_SyncGuard AI_아키텍처정의서_v1.3.docx     |     (착수 단계) :  EMP_INT_020_SyncGuard AI_작업분할구조도(WBS)_v1.1_20261026.xlsx</a:t>
             </a:r>
           </a:p>
           <a:p>
@@ -16054,7 +16054,7 @@
                           </a:solidFill>
                           <a:latin typeface="맑은 고딕"/>
                         </a:rPr>
-                        <a:t>규칙사전정의서(010), 프롬프트명세서(020), myBeaker연계명세서(030)</a:t>
+                        <a:t>규칙사전정의서(010), 프롬프트명세서(020), ProductLab연계명세서(030)</a:t>
                       </a:r>
                     </a:p>
                   </a:txBody>
@@ -16840,7 +16840,7 @@
                 </a:solidFill>
                 <a:latin typeface="맑은 고딕"/>
               </a:rPr>
-              <a:t>산출물 ID : GRV_MAN_070  |  버전 : v1.0</a:t>
+              <a:t>산출물 ID : EMP_MAN_070  |  버전 : v1.0</a:t>
             </a:r>
           </a:p>
         </p:txBody>
@@ -17052,7 +17052,7 @@
                 </a:solidFill>
                 <a:latin typeface="맑은 고딕"/>
               </a:rPr>
-              <a:t>아모레퍼시픽 Claimworks-Claims AI 시스템 구축  |  문서관리 계획서</a:t>
+              <a:t>한빛글로벌 SyncGuard AI 시스템 구축  |  문서관리 계획서</a:t>
             </a:r>
           </a:p>
         </p:txBody>
@@ -17136,7 +17136,7 @@
                 </a:solidFill>
                 <a:latin typeface="맑은 고딕"/>
               </a:rPr>
-              <a:t>발주사 : AMOREPACIFIC   |   수행사 : ㈜그로브소프트 (GROVE)</a:t>
+              <a:t>발주사 : HANBIT GLOBAL   |   수행사 : ㈜엠파시 (Empasy Inc.)</a:t>
             </a:r>
           </a:p>
         </p:txBody>
@@ -17591,7 +17591,7 @@
                           </a:solidFill>
                           <a:latin typeface="맑은 고딕"/>
                         </a:rPr>
-                        <a:t>GRV_INT_000 ~ 020</a:t>
+                        <a:t>EMP_INT_000 ~ 020</a:t>
                       </a:r>
                     </a:p>
                   </a:txBody>
@@ -17943,7 +17943,7 @@
                           </a:solidFill>
                           <a:latin typeface="맑은 고딕"/>
                         </a:rPr>
-                        <a:t>GRV_ANL_010 ~ 050</a:t>
+                        <a:t>EMP_ANL_010 ~ 050</a:t>
                       </a:r>
                     </a:p>
                   </a:txBody>
@@ -18295,7 +18295,7 @@
                           </a:solidFill>
                           <a:latin typeface="맑은 고딕"/>
                         </a:rPr>
-                        <a:t>GRV_DEG_010 ~ 060</a:t>
+                        <a:t>EMP_DEG_010 ~ 060</a:t>
                       </a:r>
                     </a:p>
                   </a:txBody>
@@ -18647,7 +18647,7 @@
                           </a:solidFill>
                           <a:latin typeface="맑은 고딕"/>
                         </a:rPr>
-                        <a:t>GRV_DEG_070 ~ 150</a:t>
+                        <a:t>EMP_DEG_070 ~ 150</a:t>
                       </a:r>
                     </a:p>
                   </a:txBody>
@@ -18999,7 +18999,7 @@
                           </a:solidFill>
                           <a:latin typeface="맑은 고딕"/>
                         </a:rPr>
-                        <a:t>GRV_EXE_010 ~ 030</a:t>
+                        <a:t>EMP_EXE_010 ~ 030</a:t>
                       </a:r>
                     </a:p>
                   </a:txBody>
@@ -19049,7 +19049,7 @@
                           </a:solidFill>
                           <a:latin typeface="맑은 고딕"/>
                         </a:rPr>
-                        <a:t>규칙사전정의서(010), AI 프롬프트명세서(020), myBeaker 실증연계명세서(030) + 응용프로그램 소스코드</a:t>
+                        <a:t>규칙사전정의서(010), AI 프롬프트명세서(020), ProductLab 실증연계명세서(030) + 응용프로그램 소스코드</a:t>
                       </a:r>
                     </a:p>
                   </a:txBody>
@@ -19351,7 +19351,7 @@
                           </a:solidFill>
                           <a:latin typeface="맑은 고딕"/>
                         </a:rPr>
-                        <a:t>GRV_TST_010 ~ 050</a:t>
+                        <a:t>EMP_TST_010 ~ 050</a:t>
                       </a:r>
                     </a:p>
                   </a:txBody>
@@ -19703,7 +19703,7 @@
                           </a:solidFill>
                           <a:latin typeface="맑은 고딕"/>
                         </a:rPr>
-                        <a:t>GRV_IMP_010 ~ 090</a:t>
+                        <a:t>EMP_IMP_010 ~ 090</a:t>
                       </a:r>
                     </a:p>
                   </a:txBody>
@@ -20055,7 +20055,7 @@
                           </a:solidFill>
                           <a:latin typeface="맑은 고딕"/>
                         </a:rPr>
-                        <a:t>GRV_MAN_010 ~ 100</a:t>
+                        <a:t>EMP_MAN_010 ~ 100</a:t>
                       </a:r>
                     </a:p>
                   </a:txBody>
@@ -20437,7 +20437,7 @@
                 </a:solidFill>
                 <a:latin typeface="맑은 고딕"/>
               </a:rPr>
-              <a:t>산출물 ID : GRV_MAN_070  |  버전 : v1.0</a:t>
+              <a:t>산출물 ID : EMP_MAN_070  |  버전 : v1.0</a:t>
             </a:r>
           </a:p>
         </p:txBody>
@@ -20649,7 +20649,7 @@
                 </a:solidFill>
                 <a:latin typeface="맑은 고딕"/>
               </a:rPr>
-              <a:t>아모레퍼시픽 Claimworks-Claims AI 시스템 구축  |  문서관리 계획서</a:t>
+              <a:t>한빛글로벌 SyncGuard AI 시스템 구축  |  문서관리 계획서</a:t>
             </a:r>
           </a:p>
         </p:txBody>
@@ -20733,7 +20733,7 @@
                 </a:solidFill>
                 <a:latin typeface="맑은 고딕"/>
               </a:rPr>
-              <a:t>발주사 : AMOREPACIFIC   |   수행사 : ㈜그로브소프트 (GROVE)</a:t>
+              <a:t>발주사 : HANBIT GLOBAL   |   수행사 : ㈜엠파시 (Empasy Inc.)</a:t>
             </a:r>
           </a:p>
         </p:txBody>
@@ -21899,7 +21899,7 @@
                 </a:solidFill>
                 <a:latin typeface="맑은 고딕"/>
               </a:rPr>
-              <a:t>• 하단 푸터 : 프로젝트명 | 대외비 | 페이지 번호 | 발주사·수행사 명시</a:t>
+              <a:t>• 하단 푸터 : 한빛글로벌 SyncGuard AI | 대외비 | 페이지 번호 | 발주사·수행사 명시</a:t>
             </a:r>
           </a:p>
         </p:txBody>
@@ -22131,7 +22131,7 @@
                 </a:solidFill>
                 <a:latin typeface="맑은 고딕"/>
               </a:rPr>
-              <a:t>산출물 ID : GRV_MAN_070  |  버전 : v1.0</a:t>
+              <a:t>산출물 ID : EMP_MAN_070  |  버전 : v1.0</a:t>
             </a:r>
           </a:p>
         </p:txBody>
@@ -22343,7 +22343,7 @@
                 </a:solidFill>
                 <a:latin typeface="맑은 고딕"/>
               </a:rPr>
-              <a:t>아모레퍼시픽 Claimworks-Claims AI 시스템 구축  |  문서관리 계획서</a:t>
+              <a:t>한빛글로벌 SyncGuard AI 시스템 구축  |  문서관리 계획서</a:t>
             </a:r>
           </a:p>
         </p:txBody>
@@ -22427,7 +22427,7 @@
                 </a:solidFill>
                 <a:latin typeface="맑은 고딕"/>
               </a:rPr>
-              <a:t>발주사 : AMOREPACIFIC   |   수행사 : ㈜그로브소프트 (GROVE)</a:t>
+              <a:t>발주사 : HANBIT GLOBAL   |   수행사 : ㈜엠파시 (Empasy Inc.)</a:t>
             </a:r>
           </a:p>
         </p:txBody>
@@ -22970,7 +22970,7 @@
                 </a:solidFill>
                 <a:latin typeface="맑은 고딕"/>
               </a:rPr>
-              <a:t>[총괄 AA (오병문)</a:t>
+              <a:t>[총괄 AA (박준혁)</a:t>
             </a:r>
           </a:p>
           <a:p>
@@ -23289,7 +23289,7 @@
                 </a:solidFill>
                 <a:latin typeface="맑은 고딕"/>
               </a:rPr>
-              <a:t>[수행사 PMO (황자영)</a:t>
+              <a:t>[수행사 PMO (이지훈)</a:t>
             </a:r>
           </a:p>
           <a:p>
@@ -23308,7 +23308,7 @@
                 </a:solidFill>
                 <a:latin typeface="맑은 고딕"/>
               </a:rPr>
-              <a:t>수행 PM (김재은)]</a:t>
+              <a:t>수행 PM (김태윤)]</a:t>
             </a:r>
           </a:p>
           <a:p>
@@ -23608,7 +23608,7 @@
                 </a:solidFill>
                 <a:latin typeface="맑은 고딕"/>
               </a:rPr>
-              <a:t>[아모레퍼시픽</a:t>
+              <a:t>[한빛글로벌</a:t>
             </a:r>
           </a:p>
           <a:p>
@@ -24677,7 +24677,7 @@
                           </a:solidFill>
                           <a:latin typeface="맑은 고딕"/>
                         </a:rPr>
-                        <a:t>수행사 PMO (황자영), 수행 PM (김재은)</a:t>
+                        <a:t>수행사 PMO (이지훈), 수행 PM (김태윤)</a:t>
                       </a:r>
                     </a:p>
                   </a:txBody>
@@ -24929,7 +24929,7 @@
                           </a:solidFill>
                           <a:latin typeface="맑은 고딕"/>
                         </a:rPr>
-                        <a:t>발주사 PM(박주열/김경호), RA Lab, 수행 PM</a:t>
+                        <a:t>발주사 PM(정민수/한승우), RA Lab, 수행 PM</a:t>
                       </a:r>
                     </a:p>
                   </a:txBody>
@@ -25161,7 +25161,7 @@
                 </a:solidFill>
                 <a:latin typeface="맑은 고딕"/>
               </a:rPr>
-              <a:t>산출물 ID : GRV_MAN_070  |  버전 : v1.0</a:t>
+              <a:t>산출물 ID : EMP_MAN_070  |  버전 : v1.0</a:t>
             </a:r>
           </a:p>
         </p:txBody>
@@ -25373,7 +25373,7 @@
                 </a:solidFill>
                 <a:latin typeface="맑은 고딕"/>
               </a:rPr>
-              <a:t>아모레퍼시픽 Claimworks-Claims AI 시스템 구축  |  문서관리 계획서</a:t>
+              <a:t>한빛글로벌 SyncGuard AI 시스템 구축  |  문서관리 계획서</a:t>
             </a:r>
           </a:p>
         </p:txBody>
@@ -25457,7 +25457,7 @@
                 </a:solidFill>
                 <a:latin typeface="맑은 고딕"/>
               </a:rPr>
-              <a:t>발주사 : AMOREPACIFIC   |   수행사 : ㈜그로브소프트 (GROVE)</a:t>
+              <a:t>발주사 : HANBIT GLOBAL   |   수행사 : ㈜엠파시 (Empasy Inc.)</a:t>
             </a:r>
           </a:p>
         </p:txBody>
@@ -26414,7 +26414,7 @@
                           </a:solidFill>
                           <a:latin typeface="맑은 고딕"/>
                         </a:rPr>
-                        <a:t>발주사 PM (박주열/김경호)</a:t>
+                        <a:t>발주사 PM (정민수/한승우)</a:t>
                       </a:r>
                     </a:p>
                   </a:txBody>
@@ -27222,7 +27222,7 @@
                 </a:solidFill>
                 <a:latin typeface="맑은 고딕"/>
               </a:rPr>
-              <a:t>• 변경 요청 접수 : M1 설계승인 이후 문서 변경 발생 시 변경관리대장(GRV_MAN_060)에 변경사유 및 영향도 등록</a:t>
+              <a:t>• 변경 요청 접수 : M1 설계승인 이후 문서 변경 발생 시 변경관리대장(EMP_MAN_060)에 변경사유 및 영향도 등록</a:t>
             </a:r>
           </a:p>
           <a:p>
@@ -27484,7 +27484,7 @@
                 </a:solidFill>
                 <a:latin typeface="맑은 고딕"/>
               </a:rPr>
-              <a:t>📁 claim_ai (프로젝트 루트)</a:t>
+              <a:t>📁 syncguard_ai (프로젝트 루트)</a:t>
             </a:r>
           </a:p>
           <a:p>
@@ -27522,7 +27522,7 @@
                 </a:solidFill>
                 <a:latin typeface="맑은 고딕"/>
               </a:rPr>
-              <a:t> │    ├── 📁 01. 회의록 (GRV_MAN_020_회의록 / 녹취)</a:t>
+              <a:t> │    ├── 📁 01. 회의록 (EMP_MAN_020_회의록 / 녹취)</a:t>
             </a:r>
           </a:p>
           <a:p>
@@ -27541,7 +27541,7 @@
                 </a:solidFill>
                 <a:latin typeface="맑은 고딕"/>
               </a:rPr>
-              <a:t> │    ├── 📁 02. 주간보고 (GRV_MAN_010_주간업무보고서)</a:t>
+              <a:t> │    ├── 📁 02. 주간보고 (EMP_MAN_010_주간업무보고서)</a:t>
             </a:r>
           </a:p>
           <a:p>
@@ -27712,7 +27712,7 @@
                 </a:solidFill>
                 <a:latin typeface="맑은 고딕"/>
               </a:rPr>
-              <a:t> │    └── 📄 규칙사전(010), 프롬프트명세(020), myBeaker연계(030)</a:t>
+              <a:t> │    └── 📄 규칙사전(010), 프롬프트명세(020), ProductLab연계(030)</a:t>
             </a:r>
           </a:p>
           <a:p>
@@ -27909,7 +27909,7 @@
                 </a:solidFill>
                 <a:latin typeface="맑은 고딕"/>
               </a:rPr>
-              <a:t>산출물 ID : GRV_MAN_070  |  버전 : v1.0</a:t>
+              <a:t>산출물 ID : EMP_MAN_070  |  버전 : v1.0</a:t>
             </a:r>
           </a:p>
         </p:txBody>
@@ -28121,7 +28121,7 @@
                 </a:solidFill>
                 <a:latin typeface="맑은 고딕"/>
               </a:rPr>
-              <a:t>아모레퍼시픽 Claimworks-Claims AI 시스템 구축  |  문서관리 계획서</a:t>
+              <a:t>한빛글로벌 SyncGuard AI 시스템 구축  |  문서관리 계획서</a:t>
             </a:r>
           </a:p>
         </p:txBody>
@@ -28205,7 +28205,7 @@
                 </a:solidFill>
                 <a:latin typeface="맑은 고딕"/>
               </a:rPr>
-              <a:t>발주사 : AMOREPACIFIC   |   수행사 : ㈜그로브소프트 (GROVE)</a:t>
+              <a:t>발주사 : HANBIT GLOBAL   |   수행사 : ㈜엠파시 (Empasy Inc.)</a:t>
             </a:r>
           </a:p>
         </p:txBody>
@@ -29694,7 +29694,7 @@
                 </a:solidFill>
                 <a:latin typeface="맑은 고딕"/>
               </a:rPr>
-              <a:t>• 인수인계계획서(GRV_IMP_030) 기준 28종 산출물 전수 유무 및 최종 승인 버전(v1.0↑) 일치 여부 PMO 전수 실사</a:t>
+              <a:t>• 인수인계계획서(EMP_IMP_030) 기준 28종 산출물 전수 유무 및 최종 승인 버전(v1.0↑) 일치 여부 PMO 전수 실사</a:t>
             </a:r>
           </a:p>
           <a:p>
@@ -30199,7 +30199,7 @@
                 </a:solidFill>
                 <a:latin typeface="맑은 고딕"/>
               </a:rPr>
-              <a:t>• 검수확인서(GRV_IMP_040) 및 인수인계 확인서 양사 대표/PM 상호 서명 날인으로 공식 인계 종결</a:t>
+              <a:t>• 검수확인서(EMP_IMP_040) 및 인수인계 확인서 양사 대표/PM 상호 서명 날인으로 공식 인계 종결</a:t>
             </a:r>
           </a:p>
         </p:txBody>

--- a/public/templates/000_pm_suite/01_프로젝트 관리/01_통합관리/문서관리_계획서_템플릿.pptx
+++ b/public/templates/000_pm_suite/01_프로젝트 관리/01_통합관리/문서관리_계획서_템플릿.pptx
@@ -3350,7 +3350,7 @@
                 </a:solidFill>
                 <a:latin typeface="맑은 고딕"/>
               </a:rPr>
-              <a:t>한빛글로벌 SyncGuard AI 시스템 구축</a:t>
+              <a:t>한빛글로벌 SyncFlow AI 시스템 구축</a:t>
             </a:r>
           </a:p>
         </p:txBody>
@@ -3534,22 +3534,22 @@
                     </a:solidFill>
                     <a:lnL w="6350" cmpd="sng">
                       <a:solidFill>
-                        <a:srgbClr val="334155"/>
+                        <a:srgbClr val="1E3A5F"/>
                       </a:solidFill>
                     </a:lnL>
                     <a:lnR w="6350" cmpd="sng">
                       <a:solidFill>
-                        <a:srgbClr val="334155"/>
+                        <a:srgbClr val="1E3A5F"/>
                       </a:solidFill>
                     </a:lnR>
                     <a:lnT w="6350" cmpd="sng">
                       <a:solidFill>
-                        <a:srgbClr val="334155"/>
+                        <a:srgbClr val="1E3A5F"/>
                       </a:solidFill>
                     </a:lnT>
                     <a:lnB w="6350" cmpd="sng">
                       <a:solidFill>
-                        <a:srgbClr val="334155"/>
+                        <a:srgbClr val="1E3A5F"/>
                       </a:solidFill>
                     </a:lnB>
                   </a:tcPr>
@@ -3574,7 +3574,7 @@
                           </a:solidFill>
                           <a:latin typeface="맑은 고딕"/>
                         </a:rPr>
-                        <a:t>한빛글로벌 SyncGuard AI 시스템 구축 용역</a:t>
+                        <a:t>한빛글로벌 SyncFlow AI 시스템 구축 용역</a:t>
                       </a:r>
                     </a:p>
                   </a:txBody>
@@ -3584,22 +3584,22 @@
                     </a:solidFill>
                     <a:lnL w="6350" cmpd="sng">
                       <a:solidFill>
-                        <a:srgbClr val="334155"/>
+                        <a:srgbClr val="1E3A5F"/>
                       </a:solidFill>
                     </a:lnL>
                     <a:lnR w="6350" cmpd="sng">
                       <a:solidFill>
-                        <a:srgbClr val="334155"/>
+                        <a:srgbClr val="1E3A5F"/>
                       </a:solidFill>
                     </a:lnR>
                     <a:lnT w="6350" cmpd="sng">
                       <a:solidFill>
-                        <a:srgbClr val="334155"/>
+                        <a:srgbClr val="1E3A5F"/>
                       </a:solidFill>
                     </a:lnT>
                     <a:lnB w="6350" cmpd="sng">
                       <a:solidFill>
-                        <a:srgbClr val="334155"/>
+                        <a:srgbClr val="1E3A5F"/>
                       </a:solidFill>
                     </a:lnB>
                   </a:tcPr>
@@ -3636,22 +3636,22 @@
                     </a:solidFill>
                     <a:lnL w="6350" cmpd="sng">
                       <a:solidFill>
-                        <a:srgbClr val="334155"/>
+                        <a:srgbClr val="1E3A5F"/>
                       </a:solidFill>
                     </a:lnL>
                     <a:lnR w="6350" cmpd="sng">
                       <a:solidFill>
-                        <a:srgbClr val="334155"/>
+                        <a:srgbClr val="1E3A5F"/>
                       </a:solidFill>
                     </a:lnR>
                     <a:lnT w="6350" cmpd="sng">
                       <a:solidFill>
-                        <a:srgbClr val="334155"/>
+                        <a:srgbClr val="1E3A5F"/>
                       </a:solidFill>
                     </a:lnT>
                     <a:lnB w="6350" cmpd="sng">
                       <a:solidFill>
-                        <a:srgbClr val="334155"/>
+                        <a:srgbClr val="1E3A5F"/>
                       </a:solidFill>
                     </a:lnB>
                   </a:tcPr>
@@ -3686,22 +3686,22 @@
                     </a:solidFill>
                     <a:lnL w="6350" cmpd="sng">
                       <a:solidFill>
-                        <a:srgbClr val="334155"/>
+                        <a:srgbClr val="1E3A5F"/>
                       </a:solidFill>
                     </a:lnL>
                     <a:lnR w="6350" cmpd="sng">
                       <a:solidFill>
-                        <a:srgbClr val="334155"/>
+                        <a:srgbClr val="1E3A5F"/>
                       </a:solidFill>
                     </a:lnR>
                     <a:lnT w="6350" cmpd="sng">
                       <a:solidFill>
-                        <a:srgbClr val="334155"/>
+                        <a:srgbClr val="1E3A5F"/>
                       </a:solidFill>
                     </a:lnT>
                     <a:lnB w="6350" cmpd="sng">
                       <a:solidFill>
-                        <a:srgbClr val="334155"/>
+                        <a:srgbClr val="1E3A5F"/>
                       </a:solidFill>
                     </a:lnB>
                   </a:tcPr>
@@ -3738,22 +3738,22 @@
                     </a:solidFill>
                     <a:lnL w="6350" cmpd="sng">
                       <a:solidFill>
-                        <a:srgbClr val="334155"/>
+                        <a:srgbClr val="1E3A5F"/>
                       </a:solidFill>
                     </a:lnL>
                     <a:lnR w="6350" cmpd="sng">
                       <a:solidFill>
-                        <a:srgbClr val="334155"/>
+                        <a:srgbClr val="1E3A5F"/>
                       </a:solidFill>
                     </a:lnR>
                     <a:lnT w="6350" cmpd="sng">
                       <a:solidFill>
-                        <a:srgbClr val="334155"/>
+                        <a:srgbClr val="1E3A5F"/>
                       </a:solidFill>
                     </a:lnT>
                     <a:lnB w="6350" cmpd="sng">
                       <a:solidFill>
-                        <a:srgbClr val="334155"/>
+                        <a:srgbClr val="1E3A5F"/>
                       </a:solidFill>
                     </a:lnB>
                   </a:tcPr>
@@ -3778,7 +3778,7 @@
                           </a:solidFill>
                           <a:latin typeface="맑은 고딕"/>
                         </a:rPr>
-                        <a:t>주식회사 한빛글로벌 (연구전략Lab / ERP플랫폼기획팀 / RA Lab)</a:t>
+                        <a:t>주식회사 한빛글로벌 (공급망혁신팀 / ERP플랫폼기획팀 / 품질법무검증팀)</a:t>
                       </a:r>
                     </a:p>
                   </a:txBody>
@@ -3788,22 +3788,22 @@
                     </a:solidFill>
                     <a:lnL w="6350" cmpd="sng">
                       <a:solidFill>
-                        <a:srgbClr val="334155"/>
+                        <a:srgbClr val="1E3A5F"/>
                       </a:solidFill>
                     </a:lnL>
                     <a:lnR w="6350" cmpd="sng">
                       <a:solidFill>
-                        <a:srgbClr val="334155"/>
+                        <a:srgbClr val="1E3A5F"/>
                       </a:solidFill>
                     </a:lnR>
                     <a:lnT w="6350" cmpd="sng">
                       <a:solidFill>
-                        <a:srgbClr val="334155"/>
+                        <a:srgbClr val="1E3A5F"/>
                       </a:solidFill>
                     </a:lnT>
                     <a:lnB w="6350" cmpd="sng">
                       <a:solidFill>
-                        <a:srgbClr val="334155"/>
+                        <a:srgbClr val="1E3A5F"/>
                       </a:solidFill>
                     </a:lnB>
                   </a:tcPr>
@@ -3840,22 +3840,22 @@
                     </a:solidFill>
                     <a:lnL w="6350" cmpd="sng">
                       <a:solidFill>
-                        <a:srgbClr val="334155"/>
+                        <a:srgbClr val="1E3A5F"/>
                       </a:solidFill>
                     </a:lnL>
                     <a:lnR w="6350" cmpd="sng">
                       <a:solidFill>
-                        <a:srgbClr val="334155"/>
+                        <a:srgbClr val="1E3A5F"/>
                       </a:solidFill>
                     </a:lnR>
                     <a:lnT w="6350" cmpd="sng">
                       <a:solidFill>
-                        <a:srgbClr val="334155"/>
+                        <a:srgbClr val="1E3A5F"/>
                       </a:solidFill>
                     </a:lnT>
                     <a:lnB w="6350" cmpd="sng">
                       <a:solidFill>
-                        <a:srgbClr val="334155"/>
+                        <a:srgbClr val="1E3A5F"/>
                       </a:solidFill>
                     </a:lnB>
                   </a:tcPr>
@@ -3890,22 +3890,22 @@
                     </a:solidFill>
                     <a:lnL w="6350" cmpd="sng">
                       <a:solidFill>
-                        <a:srgbClr val="334155"/>
+                        <a:srgbClr val="1E3A5F"/>
                       </a:solidFill>
                     </a:lnL>
                     <a:lnR w="6350" cmpd="sng">
                       <a:solidFill>
-                        <a:srgbClr val="334155"/>
+                        <a:srgbClr val="1E3A5F"/>
                       </a:solidFill>
                     </a:lnR>
                     <a:lnT w="6350" cmpd="sng">
                       <a:solidFill>
-                        <a:srgbClr val="334155"/>
+                        <a:srgbClr val="1E3A5F"/>
                       </a:solidFill>
                     </a:lnT>
                     <a:lnB w="6350" cmpd="sng">
                       <a:solidFill>
-                        <a:srgbClr val="334155"/>
+                        <a:srgbClr val="1E3A5F"/>
                       </a:solidFill>
                     </a:lnB>
                   </a:tcPr>
@@ -3942,22 +3942,22 @@
                     </a:solidFill>
                     <a:lnL w="6350" cmpd="sng">
                       <a:solidFill>
-                        <a:srgbClr val="334155"/>
+                        <a:srgbClr val="1E3A5F"/>
                       </a:solidFill>
                     </a:lnL>
                     <a:lnR w="6350" cmpd="sng">
                       <a:solidFill>
-                        <a:srgbClr val="334155"/>
+                        <a:srgbClr val="1E3A5F"/>
                       </a:solidFill>
                     </a:lnR>
                     <a:lnT w="6350" cmpd="sng">
                       <a:solidFill>
-                        <a:srgbClr val="334155"/>
+                        <a:srgbClr val="1E3A5F"/>
                       </a:solidFill>
                     </a:lnT>
                     <a:lnB w="6350" cmpd="sng">
                       <a:solidFill>
-                        <a:srgbClr val="334155"/>
+                        <a:srgbClr val="1E3A5F"/>
                       </a:solidFill>
                     </a:lnB>
                   </a:tcPr>
@@ -3992,22 +3992,22 @@
                     </a:solidFill>
                     <a:lnL w="6350" cmpd="sng">
                       <a:solidFill>
-                        <a:srgbClr val="334155"/>
+                        <a:srgbClr val="1E3A5F"/>
                       </a:solidFill>
                     </a:lnL>
                     <a:lnR w="6350" cmpd="sng">
                       <a:solidFill>
-                        <a:srgbClr val="334155"/>
+                        <a:srgbClr val="1E3A5F"/>
                       </a:solidFill>
                     </a:lnR>
                     <a:lnT w="6350" cmpd="sng">
                       <a:solidFill>
-                        <a:srgbClr val="334155"/>
+                        <a:srgbClr val="1E3A5F"/>
                       </a:solidFill>
                     </a:lnT>
                     <a:lnB w="6350" cmpd="sng">
                       <a:solidFill>
-                        <a:srgbClr val="334155"/>
+                        <a:srgbClr val="1E3A5F"/>
                       </a:solidFill>
                     </a:lnB>
                   </a:tcPr>
@@ -4709,11 +4709,11 @@
             <a:avLst/>
           </a:prstGeom>
           <a:solidFill>
-            <a:srgbClr val="1E293B"/>
+            <a:srgbClr val="0F2942"/>
           </a:solidFill>
           <a:ln w="12700">
             <a:solidFill>
-              <a:srgbClr val="334155"/>
+              <a:srgbClr val="1E3A5F"/>
             </a:solidFill>
           </a:ln>
         </p:spPr>
@@ -4913,7 +4913,7 @@
                 </a:solidFill>
                 <a:latin typeface="맑은 고딕"/>
               </a:rPr>
-              <a:t>• 본 문서는 전사 표준 프로젝트 관리 템플릿이자 한빛글로벌 SyncGuard AI 실전 기준서입니다.</a:t>
+              <a:t>• 본 문서는 전사 표준 프로젝트 관리 템플릿이자 한빛글로벌 SyncFlow AI 실전 기준서입니다.</a:t>
             </a:r>
           </a:p>
           <a:p>
@@ -5265,7 +5265,7 @@
                 </a:solidFill>
                 <a:latin typeface="맑은 고딕"/>
               </a:rPr>
-              <a:t>한빛글로벌 SyncGuard AI 시스템 구축  |  문서관리 계획서</a:t>
+              <a:t>한빛글로벌 SyncFlow AI 시스템 구축  |  문서관리 계획서</a:t>
             </a:r>
           </a:p>
         </p:txBody>
@@ -5699,7 +5699,7 @@
                       <a:r>
                         <a:rPr sz="919" b="1">
                           <a:solidFill>
-                            <a:srgbClr val="1E293B"/>
+                            <a:srgbClr val="0F2942"/>
                           </a:solidFill>
                           <a:latin typeface="맑은 고딕"/>
                         </a:rPr>
@@ -5749,7 +5749,7 @@
                       <a:r>
                         <a:rPr sz="919" b="1">
                           <a:solidFill>
-                            <a:srgbClr val="1E293B"/>
+                            <a:srgbClr val="0F2942"/>
                           </a:solidFill>
                           <a:latin typeface="맑은 고딕"/>
                         </a:rPr>
@@ -5799,7 +5799,7 @@
                       <a:r>
                         <a:rPr sz="919" b="0">
                           <a:solidFill>
-                            <a:srgbClr val="1E293B"/>
+                            <a:srgbClr val="0F2942"/>
                           </a:solidFill>
                           <a:latin typeface="맑은 고딕"/>
                         </a:rPr>
@@ -5849,7 +5849,7 @@
                       <a:r>
                         <a:rPr sz="919" b="0">
                           <a:solidFill>
-                            <a:srgbClr val="1E293B"/>
+                            <a:srgbClr val="0F2942"/>
                           </a:solidFill>
                           <a:latin typeface="맑은 고딕"/>
                         </a:rPr>
@@ -5949,7 +5949,7 @@
                       <a:r>
                         <a:rPr sz="919" b="0">
                           <a:solidFill>
-                            <a:srgbClr val="1E293B"/>
+                            <a:srgbClr val="0F2942"/>
                           </a:solidFill>
                           <a:latin typeface="맑은 고딕"/>
                         </a:rPr>
@@ -6001,7 +6001,7 @@
                       <a:r>
                         <a:rPr sz="919" b="1">
                           <a:solidFill>
-                            <a:srgbClr val="1E293B"/>
+                            <a:srgbClr val="0F2942"/>
                           </a:solidFill>
                           <a:latin typeface="맑은 고딕"/>
                         </a:rPr>
@@ -6051,7 +6051,7 @@
                       <a:r>
                         <a:rPr sz="919" b="1">
                           <a:solidFill>
-                            <a:srgbClr val="1E293B"/>
+                            <a:srgbClr val="0F2942"/>
                           </a:solidFill>
                           <a:latin typeface="맑은 고딕"/>
                         </a:rPr>
@@ -6101,7 +6101,7 @@
                       <a:r>
                         <a:rPr sz="919" b="0">
                           <a:solidFill>
-                            <a:srgbClr val="1E293B"/>
+                            <a:srgbClr val="0F2942"/>
                           </a:solidFill>
                           <a:latin typeface="맑은 고딕"/>
                         </a:rPr>
@@ -6151,7 +6151,7 @@
                       <a:r>
                         <a:rPr sz="919" b="0">
                           <a:solidFill>
-                            <a:srgbClr val="1E293B"/>
+                            <a:srgbClr val="0F2942"/>
                           </a:solidFill>
                           <a:latin typeface="맑은 고딕"/>
                         </a:rPr>
@@ -6251,7 +6251,7 @@
                       <a:r>
                         <a:rPr sz="919" b="0">
                           <a:solidFill>
-                            <a:srgbClr val="1E293B"/>
+                            <a:srgbClr val="0F2942"/>
                           </a:solidFill>
                           <a:latin typeface="맑은 고딕"/>
                         </a:rPr>
@@ -6303,7 +6303,7 @@
                       <a:r>
                         <a:rPr sz="919" b="1">
                           <a:solidFill>
-                            <a:srgbClr val="1E293B"/>
+                            <a:srgbClr val="0F2942"/>
                           </a:solidFill>
                           <a:latin typeface="맑은 고딕"/>
                         </a:rPr>
@@ -6353,7 +6353,7 @@
                       <a:r>
                         <a:rPr sz="919" b="1">
                           <a:solidFill>
-                            <a:srgbClr val="1E293B"/>
+                            <a:srgbClr val="0F2942"/>
                           </a:solidFill>
                           <a:latin typeface="맑은 고딕"/>
                         </a:rPr>
@@ -6403,7 +6403,7 @@
                       <a:r>
                         <a:rPr sz="919" b="0">
                           <a:solidFill>
-                            <a:srgbClr val="1E293B"/>
+                            <a:srgbClr val="0F2942"/>
                           </a:solidFill>
                           <a:latin typeface="맑은 고딕"/>
                         </a:rPr>
@@ -6453,7 +6453,7 @@
                       <a:r>
                         <a:rPr sz="919" b="0">
                           <a:solidFill>
-                            <a:srgbClr val="1E293B"/>
+                            <a:srgbClr val="0F2942"/>
                           </a:solidFill>
                           <a:latin typeface="맑은 고딕"/>
                         </a:rPr>
@@ -6553,7 +6553,7 @@
                       <a:r>
                         <a:rPr sz="919" b="0">
                           <a:solidFill>
-                            <a:srgbClr val="1E293B"/>
+                            <a:srgbClr val="0F2942"/>
                           </a:solidFill>
                           <a:latin typeface="맑은 고딕"/>
                         </a:rPr>
@@ -6605,7 +6605,7 @@
                       <a:r>
                         <a:rPr sz="919" b="1">
                           <a:solidFill>
-                            <a:srgbClr val="1E293B"/>
+                            <a:srgbClr val="0F2942"/>
                           </a:solidFill>
                           <a:latin typeface="맑은 고딕"/>
                         </a:rPr>
@@ -6655,7 +6655,7 @@
                       <a:r>
                         <a:rPr sz="919" b="1">
                           <a:solidFill>
-                            <a:srgbClr val="1E293B"/>
+                            <a:srgbClr val="0F2942"/>
                           </a:solidFill>
                           <a:latin typeface="맑은 고딕"/>
                         </a:rPr>
@@ -6705,7 +6705,7 @@
                       <a:r>
                         <a:rPr sz="919" b="0">
                           <a:solidFill>
-                            <a:srgbClr val="1E293B"/>
+                            <a:srgbClr val="0F2942"/>
                           </a:solidFill>
                           <a:latin typeface="맑은 고딕"/>
                         </a:rPr>
@@ -6755,7 +6755,7 @@
                       <a:r>
                         <a:rPr sz="919" b="0">
                           <a:solidFill>
-                            <a:srgbClr val="1E293B"/>
+                            <a:srgbClr val="0F2942"/>
                           </a:solidFill>
                           <a:latin typeface="맑은 고딕"/>
                         </a:rPr>
@@ -6855,7 +6855,7 @@
                       <a:r>
                         <a:rPr sz="919" b="0">
                           <a:solidFill>
-                            <a:srgbClr val="1E293B"/>
+                            <a:srgbClr val="0F2942"/>
                           </a:solidFill>
                           <a:latin typeface="맑은 고딕"/>
                         </a:rPr>
@@ -6907,7 +6907,7 @@
                       <a:r>
                         <a:rPr sz="919" b="1">
                           <a:solidFill>
-                            <a:srgbClr val="1E293B"/>
+                            <a:srgbClr val="0F2942"/>
                           </a:solidFill>
                           <a:latin typeface="맑은 고딕"/>
                         </a:rPr>
@@ -6957,7 +6957,7 @@
                       <a:r>
                         <a:rPr sz="919" b="1">
                           <a:solidFill>
-                            <a:srgbClr val="1E293B"/>
+                            <a:srgbClr val="0F2942"/>
                           </a:solidFill>
                           <a:latin typeface="맑은 고딕"/>
                         </a:rPr>
@@ -7007,7 +7007,7 @@
                       <a:r>
                         <a:rPr sz="919" b="0">
                           <a:solidFill>
-                            <a:srgbClr val="1E293B"/>
+                            <a:srgbClr val="0F2942"/>
                           </a:solidFill>
                           <a:latin typeface="맑은 고딕"/>
                         </a:rPr>
@@ -7057,7 +7057,7 @@
                       <a:r>
                         <a:rPr sz="919" b="0">
                           <a:solidFill>
-                            <a:srgbClr val="1E293B"/>
+                            <a:srgbClr val="0F2942"/>
                           </a:solidFill>
                           <a:latin typeface="맑은 고딕"/>
                         </a:rPr>
@@ -7157,7 +7157,7 @@
                       <a:r>
                         <a:rPr sz="919" b="0">
                           <a:solidFill>
-                            <a:srgbClr val="1E293B"/>
+                            <a:srgbClr val="0F2942"/>
                           </a:solidFill>
                           <a:latin typeface="맑은 고딕"/>
                         </a:rPr>
@@ -7209,7 +7209,7 @@
                       <a:r>
                         <a:rPr sz="919" b="1">
                           <a:solidFill>
-                            <a:srgbClr val="1E293B"/>
+                            <a:srgbClr val="0F2942"/>
                           </a:solidFill>
                           <a:latin typeface="맑은 고딕"/>
                         </a:rPr>
@@ -7259,7 +7259,7 @@
                       <a:r>
                         <a:rPr sz="919" b="1">
                           <a:solidFill>
-                            <a:srgbClr val="1E293B"/>
+                            <a:srgbClr val="0F2942"/>
                           </a:solidFill>
                           <a:latin typeface="맑은 고딕"/>
                         </a:rPr>
@@ -7309,7 +7309,7 @@
                       <a:r>
                         <a:rPr sz="919" b="0">
                           <a:solidFill>
-                            <a:srgbClr val="1E293B"/>
+                            <a:srgbClr val="0F2942"/>
                           </a:solidFill>
                           <a:latin typeface="맑은 고딕"/>
                         </a:rPr>
@@ -7359,7 +7359,7 @@
                       <a:r>
                         <a:rPr sz="919" b="0">
                           <a:solidFill>
-                            <a:srgbClr val="1E293B"/>
+                            <a:srgbClr val="0F2942"/>
                           </a:solidFill>
                           <a:latin typeface="맑은 고딕"/>
                         </a:rPr>
@@ -7459,7 +7459,7 @@
                       <a:r>
                         <a:rPr sz="919" b="0">
                           <a:solidFill>
-                            <a:srgbClr val="1E293B"/>
+                            <a:srgbClr val="0F2942"/>
                           </a:solidFill>
                           <a:latin typeface="맑은 고딕"/>
                         </a:rPr>
@@ -7511,7 +7511,7 @@
                       <a:r>
                         <a:rPr sz="919" b="1">
                           <a:solidFill>
-                            <a:srgbClr val="1E293B"/>
+                            <a:srgbClr val="0F2942"/>
                           </a:solidFill>
                           <a:latin typeface="맑은 고딕"/>
                         </a:rPr>
@@ -7561,7 +7561,7 @@
                       <a:r>
                         <a:rPr sz="919" b="1">
                           <a:solidFill>
-                            <a:srgbClr val="1E293B"/>
+                            <a:srgbClr val="0F2942"/>
                           </a:solidFill>
                           <a:latin typeface="맑은 고딕"/>
                         </a:rPr>
@@ -7611,7 +7611,7 @@
                       <a:r>
                         <a:rPr sz="919" b="0">
                           <a:solidFill>
-                            <a:srgbClr val="1E293B"/>
+                            <a:srgbClr val="0F2942"/>
                           </a:solidFill>
                           <a:latin typeface="맑은 고딕"/>
                         </a:rPr>
@@ -7661,7 +7661,7 @@
                       <a:r>
                         <a:rPr sz="919" b="0">
                           <a:solidFill>
-                            <a:srgbClr val="1E293B"/>
+                            <a:srgbClr val="0F2942"/>
                           </a:solidFill>
                           <a:latin typeface="맑은 고딕"/>
                         </a:rPr>
@@ -7761,7 +7761,7 @@
                       <a:r>
                         <a:rPr sz="919" b="0">
                           <a:solidFill>
-                            <a:srgbClr val="1E293B"/>
+                            <a:srgbClr val="0F2942"/>
                           </a:solidFill>
                           <a:latin typeface="맑은 고딕"/>
                         </a:rPr>
@@ -7813,7 +7813,7 @@
                       <a:r>
                         <a:rPr sz="919" b="1">
                           <a:solidFill>
-                            <a:srgbClr val="1E293B"/>
+                            <a:srgbClr val="0F2942"/>
                           </a:solidFill>
                           <a:latin typeface="맑은 고딕"/>
                         </a:rPr>
@@ -7863,7 +7863,7 @@
                       <a:r>
                         <a:rPr sz="919" b="1">
                           <a:solidFill>
-                            <a:srgbClr val="1E293B"/>
+                            <a:srgbClr val="0F2942"/>
                           </a:solidFill>
                           <a:latin typeface="맑은 고딕"/>
                         </a:rPr>
@@ -7913,7 +7913,7 @@
                       <a:r>
                         <a:rPr sz="919" b="0">
                           <a:solidFill>
-                            <a:srgbClr val="1E293B"/>
+                            <a:srgbClr val="0F2942"/>
                           </a:solidFill>
                           <a:latin typeface="맑은 고딕"/>
                         </a:rPr>
@@ -7963,7 +7963,7 @@
                       <a:r>
                         <a:rPr sz="919" b="0">
                           <a:solidFill>
-                            <a:srgbClr val="1E293B"/>
+                            <a:srgbClr val="0F2942"/>
                           </a:solidFill>
                           <a:latin typeface="맑은 고딕"/>
                         </a:rPr>
@@ -8063,7 +8063,7 @@
                       <a:r>
                         <a:rPr sz="919" b="0">
                           <a:solidFill>
-                            <a:srgbClr val="1E293B"/>
+                            <a:srgbClr val="0F2942"/>
                           </a:solidFill>
                           <a:latin typeface="맑은 고딕"/>
                         </a:rPr>
@@ -8541,7 +8541,7 @@
                 </a:solidFill>
                 <a:latin typeface="맑은 고딕"/>
               </a:rPr>
-              <a:t>한빛글로벌 SyncGuard AI 시스템 구축  |  문서관리 계획서</a:t>
+              <a:t>한빛글로벌 SyncFlow AI 시스템 구축  |  문서관리 계획서</a:t>
             </a:r>
           </a:p>
         </p:txBody>
@@ -8966,7 +8966,7 @@
                       <a:r>
                         <a:rPr sz="900" b="1">
                           <a:solidFill>
-                            <a:srgbClr val="1E293B"/>
+                            <a:srgbClr val="0F2942"/>
                           </a:solidFill>
                           <a:latin typeface="맑은 고딕"/>
                         </a:rPr>
@@ -9016,7 +9016,7 @@
                       <a:r>
                         <a:rPr sz="900" b="0">
                           <a:solidFill>
-                            <a:srgbClr val="1E293B"/>
+                            <a:srgbClr val="0F2942"/>
                           </a:solidFill>
                           <a:latin typeface="맑은 고딕"/>
                         </a:rPr>
@@ -9066,7 +9066,7 @@
                       <a:r>
                         <a:rPr sz="900" b="0">
                           <a:solidFill>
-                            <a:srgbClr val="1E293B"/>
+                            <a:srgbClr val="0F2942"/>
                           </a:solidFill>
                           <a:latin typeface="맑은 고딕"/>
                         </a:rPr>
@@ -9116,7 +9116,7 @@
                       <a:r>
                         <a:rPr sz="900" b="0">
                           <a:solidFill>
-                            <a:srgbClr val="1E293B"/>
+                            <a:srgbClr val="0F2942"/>
                           </a:solidFill>
                           <a:latin typeface="맑은 고딕"/>
                         </a:rPr>
@@ -9166,7 +9166,7 @@
                       <a:r>
                         <a:rPr sz="900" b="0">
                           <a:solidFill>
-                            <a:srgbClr val="1E293B"/>
+                            <a:srgbClr val="0F2942"/>
                           </a:solidFill>
                           <a:latin typeface="맑은 고딕"/>
                         </a:rPr>
@@ -9218,7 +9218,7 @@
                       <a:r>
                         <a:rPr sz="900" b="1">
                           <a:solidFill>
-                            <a:srgbClr val="1E293B"/>
+                            <a:srgbClr val="0F2942"/>
                           </a:solidFill>
                           <a:latin typeface="맑은 고딕"/>
                         </a:rPr>
@@ -9268,7 +9268,7 @@
                       <a:r>
                         <a:rPr sz="900" b="0">
                           <a:solidFill>
-                            <a:srgbClr val="1E293B"/>
+                            <a:srgbClr val="0F2942"/>
                           </a:solidFill>
                           <a:latin typeface="맑은 고딕"/>
                         </a:rPr>
@@ -9318,7 +9318,7 @@
                       <a:r>
                         <a:rPr sz="900" b="0">
                           <a:solidFill>
-                            <a:srgbClr val="1E293B"/>
+                            <a:srgbClr val="0F2942"/>
                           </a:solidFill>
                           <a:latin typeface="맑은 고딕"/>
                         </a:rPr>
@@ -9368,7 +9368,7 @@
                       <a:r>
                         <a:rPr sz="900" b="0">
                           <a:solidFill>
-                            <a:srgbClr val="1E293B"/>
+                            <a:srgbClr val="0F2942"/>
                           </a:solidFill>
                           <a:latin typeface="맑은 고딕"/>
                         </a:rPr>
@@ -9418,7 +9418,7 @@
                       <a:r>
                         <a:rPr sz="900" b="0">
                           <a:solidFill>
-                            <a:srgbClr val="1E293B"/>
+                            <a:srgbClr val="0F2942"/>
                           </a:solidFill>
                           <a:latin typeface="맑은 고딕"/>
                         </a:rPr>
@@ -9470,7 +9470,7 @@
                       <a:r>
                         <a:rPr sz="900" b="1">
                           <a:solidFill>
-                            <a:srgbClr val="1E293B"/>
+                            <a:srgbClr val="0F2942"/>
                           </a:solidFill>
                           <a:latin typeface="맑은 고딕"/>
                         </a:rPr>
@@ -9520,7 +9520,7 @@
                       <a:r>
                         <a:rPr sz="900" b="0">
                           <a:solidFill>
-                            <a:srgbClr val="1E293B"/>
+                            <a:srgbClr val="0F2942"/>
                           </a:solidFill>
                           <a:latin typeface="맑은 고딕"/>
                         </a:rPr>
@@ -9570,7 +9570,7 @@
                       <a:r>
                         <a:rPr sz="900" b="0">
                           <a:solidFill>
-                            <a:srgbClr val="1E293B"/>
+                            <a:srgbClr val="0F2942"/>
                           </a:solidFill>
                           <a:latin typeface="맑은 고딕"/>
                         </a:rPr>
@@ -9620,7 +9620,7 @@
                       <a:r>
                         <a:rPr sz="900" b="0">
                           <a:solidFill>
-                            <a:srgbClr val="1E293B"/>
+                            <a:srgbClr val="0F2942"/>
                           </a:solidFill>
                           <a:latin typeface="맑은 고딕"/>
                         </a:rPr>
@@ -9670,7 +9670,7 @@
                       <a:r>
                         <a:rPr sz="900" b="0">
                           <a:solidFill>
-                            <a:srgbClr val="1E293B"/>
+                            <a:srgbClr val="0F2942"/>
                           </a:solidFill>
                           <a:latin typeface="맑은 고딕"/>
                         </a:rPr>
@@ -9924,7 +9924,7 @@
             <a:r>
               <a:rPr sz="950" b="0">
                 <a:solidFill>
-                  <a:srgbClr val="1E293B"/>
+                  <a:srgbClr val="0F2942"/>
                 </a:solidFill>
                 <a:latin typeface="맑은 고딕"/>
               </a:rPr>
@@ -9943,7 +9943,7 @@
             <a:r>
               <a:rPr sz="950" b="0">
                 <a:solidFill>
-                  <a:srgbClr val="1E293B"/>
+                  <a:srgbClr val="0F2942"/>
                 </a:solidFill>
                 <a:latin typeface="맑은 고딕"/>
               </a:rPr>
@@ -9962,11 +9962,11 @@
             <a:r>
               <a:rPr sz="950" b="0">
                 <a:solidFill>
-                  <a:srgbClr val="1E293B"/>
+                  <a:srgbClr val="0F2942"/>
                 </a:solidFill>
                 <a:latin typeface="맑은 고딕"/>
               </a:rPr>
-              <a:t>3. 교체 필수 항목 : SyncGuard AI 시스템 구축 사업, [발주사/수행사 조직], [사업기간 및 M1~M6 일정], [산출물 ID 체계], [인력/인프라 수량]</a:t>
+              <a:t>3. 교체 필수 항목 : SyncFlow AI 시스템 구축 사업, [발주사/수행사 조직], [사업기간 및 M1~M6 일정], [산출물 ID 체계], [인력/인프라 수량]</a:t>
             </a:r>
           </a:p>
           <a:p>
@@ -9981,7 +9981,7 @@
             <a:r>
               <a:rPr sz="950" b="0">
                 <a:solidFill>
-                  <a:srgbClr val="1E293B"/>
+                  <a:srgbClr val="0F2942"/>
                 </a:solidFill>
                 <a:latin typeface="맑은 고딕"/>
               </a:rPr>
@@ -12389,7 +12389,7 @@
                 </a:solidFill>
                 <a:latin typeface="맑은 고딕"/>
               </a:rPr>
-              <a:t>한빛글로벌 SyncGuard AI 시스템 구축  |  문서관리 계획서</a:t>
+              <a:t>한빛글로벌 SyncFlow AI 시스템 구축  |  문서관리 계획서</a:t>
             </a:r>
           </a:p>
         </p:txBody>
@@ -12693,7 +12693,7 @@
             <a:r>
               <a:rPr sz="1050" b="0">
                 <a:solidFill>
-                  <a:srgbClr val="1E293B"/>
+                  <a:srgbClr val="0F2942"/>
                 </a:solidFill>
                 <a:latin typeface="맑은 고딕"/>
               </a:rPr>
@@ -12712,7 +12712,7 @@
             <a:r>
               <a:rPr sz="1050" b="0">
                 <a:solidFill>
-                  <a:srgbClr val="1E293B"/>
+                  <a:srgbClr val="0F2942"/>
                 </a:solidFill>
                 <a:latin typeface="맑은 고딕"/>
               </a:rPr>
@@ -12731,7 +12731,7 @@
             <a:r>
               <a:rPr sz="1050" b="0">
                 <a:solidFill>
-                  <a:srgbClr val="1E293B"/>
+                  <a:srgbClr val="0F2942"/>
                 </a:solidFill>
                 <a:latin typeface="맑은 고딕"/>
               </a:rPr>
@@ -12955,7 +12955,7 @@
             <a:r>
               <a:rPr sz="1050" b="0">
                 <a:solidFill>
-                  <a:srgbClr val="1E293B"/>
+                  <a:srgbClr val="0F2942"/>
                 </a:solidFill>
                 <a:latin typeface="맑은 고딕"/>
               </a:rPr>
@@ -12974,7 +12974,7 @@
             <a:r>
               <a:rPr sz="1050" b="0">
                 <a:solidFill>
-                  <a:srgbClr val="1E293B"/>
+                  <a:srgbClr val="0F2942"/>
                 </a:solidFill>
                 <a:latin typeface="맑은 고딕"/>
               </a:rPr>
@@ -12993,7 +12993,7 @@
             <a:r>
               <a:rPr sz="1050" b="0">
                 <a:solidFill>
-                  <a:srgbClr val="1E293B"/>
+                  <a:srgbClr val="0F2942"/>
                 </a:solidFill>
                 <a:latin typeface="맑은 고딕"/>
               </a:rPr>
@@ -13217,7 +13217,7 @@
             <a:r>
               <a:rPr sz="1050" b="0">
                 <a:solidFill>
-                  <a:srgbClr val="1E293B"/>
+                  <a:srgbClr val="0F2942"/>
                 </a:solidFill>
                 <a:latin typeface="맑은 고딕"/>
               </a:rPr>
@@ -13236,7 +13236,7 @@
             <a:r>
               <a:rPr sz="1050" b="0">
                 <a:solidFill>
-                  <a:srgbClr val="1E293B"/>
+                  <a:srgbClr val="0F2942"/>
                 </a:solidFill>
                 <a:latin typeface="맑은 고딕"/>
               </a:rPr>
@@ -13255,7 +13255,7 @@
             <a:r>
               <a:rPr sz="1050" b="0">
                 <a:solidFill>
-                  <a:srgbClr val="1E293B"/>
+                  <a:srgbClr val="0F2942"/>
                 </a:solidFill>
                 <a:latin typeface="맑은 고딕"/>
               </a:rPr>
@@ -13479,11 +13479,11 @@
             <a:r>
               <a:rPr sz="1050" b="0">
                 <a:solidFill>
-                  <a:srgbClr val="1E293B"/>
+                  <a:srgbClr val="0F2942"/>
                 </a:solidFill>
                 <a:latin typeface="맑은 고딕"/>
               </a:rPr>
-              <a:t>• 미출시 화장품 시안, 사내 인프라 구성도, 계정 정보 등 민감 문서는 '대외비/극비' 등급으로 지정하여 외부 유출 차단</a:t>
+              <a:t>• 미출시 전장부품 계약·도서, 사내 인프라 구성도, 계정 정보 등 민감 문서는 '대외비/극비' 등급으로 지정하여 외부 유출 차단</a:t>
             </a:r>
           </a:p>
           <a:p>
@@ -13498,7 +13498,7 @@
             <a:r>
               <a:rPr sz="1050" b="0">
                 <a:solidFill>
-                  <a:srgbClr val="1E293B"/>
+                  <a:srgbClr val="0F2942"/>
                 </a:solidFill>
                 <a:latin typeface="맑은 고딕"/>
               </a:rPr>
@@ -13517,7 +13517,7 @@
             <a:r>
               <a:rPr sz="1050" b="0">
                 <a:solidFill>
-                  <a:srgbClr val="1E293B"/>
+                  <a:srgbClr val="0F2942"/>
                 </a:solidFill>
                 <a:latin typeface="맑은 고딕"/>
               </a:rPr>
@@ -13965,7 +13965,7 @@
                 </a:solidFill>
                 <a:latin typeface="맑은 고딕"/>
               </a:rPr>
-              <a:t>한빛글로벌 SyncGuard AI 시스템 구축  |  문서관리 계획서</a:t>
+              <a:t>한빛글로벌 SyncFlow AI 시스템 구축  |  문서관리 계획서</a:t>
             </a:r>
           </a:p>
         </p:txBody>
@@ -14269,11 +14269,11 @@
             <a:r>
               <a:rPr sz="1050" b="0">
                 <a:solidFill>
-                  <a:srgbClr val="1E293B"/>
+                  <a:srgbClr val="0F2942"/>
                 </a:solidFill>
                 <a:latin typeface="맑은 고딕"/>
               </a:rPr>
-              <a:t>• 작성 예시 (설계 단계) :  EMP_DEG_090_SyncGuard AI_아키텍처정의서_v1.3.docx     |     (착수 단계) :  EMP_INT_020_SyncGuard AI_작업분할구조도(WBS)_v1.1_20261026.xlsx</a:t>
+              <a:t>• 작성 예시 (설계 단계) :  EMP_DEG_090_SyncFlow AI_아키텍처정의서_v1.3.docx     |     (착수 단계) :  EMP_INT_020_SyncFlow AI_작업분할구조도(WBS)_v1.1_20261026.xlsx</a:t>
             </a:r>
           </a:p>
           <a:p>
@@ -14288,11 +14288,11 @@
             <a:r>
               <a:rPr sz="1050" b="0">
                 <a:solidFill>
-                  <a:srgbClr val="1E293B"/>
+                  <a:srgbClr val="0F2942"/>
                 </a:solidFill>
                 <a:latin typeface="맑은 고딕"/>
               </a:rPr>
-              <a:t>• 타 프로젝트 재활용 시 :  [수행사코드(예: EMP/GRV)]_[단계코드(INT/MAN/ANL/DEG/EXE/TST/IMP)]_[010~990]_[고객사-과제명]_[산출물명]_v[1.0].[docx/xlsx/pptx]</a:t>
+              <a:t>• 타 프로젝트 재활용 시 :  [수행사코드(예: EMP/EMP)]_[단계코드(INT/MAN/ANL/DEG/EXE/TST/IMP)]_[010~990]_[고객사-과제명]_[산출물명]_v[1.0].[docx/xlsx/pptx]</a:t>
             </a:r>
           </a:p>
         </p:txBody>
@@ -14642,7 +14642,7 @@
                       <a:r>
                         <a:rPr sz="950" b="1">
                           <a:solidFill>
-                            <a:srgbClr val="1E293B"/>
+                            <a:srgbClr val="0F2942"/>
                           </a:solidFill>
                           <a:latin typeface="맑은 고딕"/>
                         </a:rPr>
@@ -14692,7 +14692,7 @@
                       <a:r>
                         <a:rPr sz="950" b="1">
                           <a:solidFill>
-                            <a:srgbClr val="1E293B"/>
+                            <a:srgbClr val="0F2942"/>
                           </a:solidFill>
                           <a:latin typeface="맑은 고딕"/>
                         </a:rPr>
@@ -14742,7 +14742,7 @@
                       <a:r>
                         <a:rPr sz="950" b="0">
                           <a:solidFill>
-                            <a:srgbClr val="1E293B"/>
+                            <a:srgbClr val="0F2942"/>
                           </a:solidFill>
                           <a:latin typeface="맑은 고딕"/>
                         </a:rPr>
@@ -14792,7 +14792,7 @@
                       <a:r>
                         <a:rPr sz="950" b="0">
                           <a:solidFill>
-                            <a:srgbClr val="1E293B"/>
+                            <a:srgbClr val="0F2942"/>
                           </a:solidFill>
                           <a:latin typeface="맑은 고딕"/>
                         </a:rPr>
@@ -14842,7 +14842,7 @@
                       <a:r>
                         <a:rPr sz="950" b="0">
                           <a:solidFill>
-                            <a:srgbClr val="1E293B"/>
+                            <a:srgbClr val="0F2942"/>
                           </a:solidFill>
                           <a:latin typeface="맑은 고딕"/>
                         </a:rPr>
@@ -14892,7 +14892,7 @@
                       <a:r>
                         <a:rPr sz="950" b="0">
                           <a:solidFill>
-                            <a:srgbClr val="1E293B"/>
+                            <a:srgbClr val="0F2942"/>
                           </a:solidFill>
                           <a:latin typeface="맑은 고딕"/>
                         </a:rPr>
@@ -14944,7 +14944,7 @@
                       <a:r>
                         <a:rPr sz="950" b="1">
                           <a:solidFill>
-                            <a:srgbClr val="1E293B"/>
+                            <a:srgbClr val="0F2942"/>
                           </a:solidFill>
                           <a:latin typeface="맑은 고딕"/>
                         </a:rPr>
@@ -14994,7 +14994,7 @@
                       <a:r>
                         <a:rPr sz="950" b="1">
                           <a:solidFill>
-                            <a:srgbClr val="1E293B"/>
+                            <a:srgbClr val="0F2942"/>
                           </a:solidFill>
                           <a:latin typeface="맑은 고딕"/>
                         </a:rPr>
@@ -15044,7 +15044,7 @@
                       <a:r>
                         <a:rPr sz="950" b="0">
                           <a:solidFill>
-                            <a:srgbClr val="1E293B"/>
+                            <a:srgbClr val="0F2942"/>
                           </a:solidFill>
                           <a:latin typeface="맑은 고딕"/>
                         </a:rPr>
@@ -15094,7 +15094,7 @@
                       <a:r>
                         <a:rPr sz="950" b="0">
                           <a:solidFill>
-                            <a:srgbClr val="1E293B"/>
+                            <a:srgbClr val="0F2942"/>
                           </a:solidFill>
                           <a:latin typeface="맑은 고딕"/>
                         </a:rPr>
@@ -15144,7 +15144,7 @@
                       <a:r>
                         <a:rPr sz="950" b="0">
                           <a:solidFill>
-                            <a:srgbClr val="1E293B"/>
+                            <a:srgbClr val="0F2942"/>
                           </a:solidFill>
                           <a:latin typeface="맑은 고딕"/>
                         </a:rPr>
@@ -15194,7 +15194,7 @@
                       <a:r>
                         <a:rPr sz="950" b="0">
                           <a:solidFill>
-                            <a:srgbClr val="1E293B"/>
+                            <a:srgbClr val="0F2942"/>
                           </a:solidFill>
                           <a:latin typeface="맑은 고딕"/>
                         </a:rPr>
@@ -15246,7 +15246,7 @@
                       <a:r>
                         <a:rPr sz="950" b="1">
                           <a:solidFill>
-                            <a:srgbClr val="1E293B"/>
+                            <a:srgbClr val="0F2942"/>
                           </a:solidFill>
                           <a:latin typeface="맑은 고딕"/>
                         </a:rPr>
@@ -15296,7 +15296,7 @@
                       <a:r>
                         <a:rPr sz="950" b="1">
                           <a:solidFill>
-                            <a:srgbClr val="1E293B"/>
+                            <a:srgbClr val="0F2942"/>
                           </a:solidFill>
                           <a:latin typeface="맑은 고딕"/>
                         </a:rPr>
@@ -15346,7 +15346,7 @@
                       <a:r>
                         <a:rPr sz="950" b="0">
                           <a:solidFill>
-                            <a:srgbClr val="1E293B"/>
+                            <a:srgbClr val="0F2942"/>
                           </a:solidFill>
                           <a:latin typeface="맑은 고딕"/>
                         </a:rPr>
@@ -15396,7 +15396,7 @@
                       <a:r>
                         <a:rPr sz="950" b="0">
                           <a:solidFill>
-                            <a:srgbClr val="1E293B"/>
+                            <a:srgbClr val="0F2942"/>
                           </a:solidFill>
                           <a:latin typeface="맑은 고딕"/>
                         </a:rPr>
@@ -15446,7 +15446,7 @@
                       <a:r>
                         <a:rPr sz="950" b="0">
                           <a:solidFill>
-                            <a:srgbClr val="1E293B"/>
+                            <a:srgbClr val="0F2942"/>
                           </a:solidFill>
                           <a:latin typeface="맑은 고딕"/>
                         </a:rPr>
@@ -15496,7 +15496,7 @@
                       <a:r>
                         <a:rPr sz="950" b="0">
                           <a:solidFill>
-                            <a:srgbClr val="1E293B"/>
+                            <a:srgbClr val="0F2942"/>
                           </a:solidFill>
                           <a:latin typeface="맑은 고딕"/>
                         </a:rPr>
@@ -15548,7 +15548,7 @@
                       <a:r>
                         <a:rPr sz="950" b="1">
                           <a:solidFill>
-                            <a:srgbClr val="1E293B"/>
+                            <a:srgbClr val="0F2942"/>
                           </a:solidFill>
                           <a:latin typeface="맑은 고딕"/>
                         </a:rPr>
@@ -15598,7 +15598,7 @@
                       <a:r>
                         <a:rPr sz="950" b="1">
                           <a:solidFill>
-                            <a:srgbClr val="1E293B"/>
+                            <a:srgbClr val="0F2942"/>
                           </a:solidFill>
                           <a:latin typeface="맑은 고딕"/>
                         </a:rPr>
@@ -15648,7 +15648,7 @@
                       <a:r>
                         <a:rPr sz="950" b="0">
                           <a:solidFill>
-                            <a:srgbClr val="1E293B"/>
+                            <a:srgbClr val="0F2942"/>
                           </a:solidFill>
                           <a:latin typeface="맑은 고딕"/>
                         </a:rPr>
@@ -15698,7 +15698,7 @@
                       <a:r>
                         <a:rPr sz="950" b="0">
                           <a:solidFill>
-                            <a:srgbClr val="1E293B"/>
+                            <a:srgbClr val="0F2942"/>
                           </a:solidFill>
                           <a:latin typeface="맑은 고딕"/>
                         </a:rPr>
@@ -15748,7 +15748,7 @@
                       <a:r>
                         <a:rPr sz="950" b="0">
                           <a:solidFill>
-                            <a:srgbClr val="1E293B"/>
+                            <a:srgbClr val="0F2942"/>
                           </a:solidFill>
                           <a:latin typeface="맑은 고딕"/>
                         </a:rPr>
@@ -15798,7 +15798,7 @@
                       <a:r>
                         <a:rPr sz="950" b="0">
                           <a:solidFill>
-                            <a:srgbClr val="1E293B"/>
+                            <a:srgbClr val="0F2942"/>
                           </a:solidFill>
                           <a:latin typeface="맑은 고딕"/>
                         </a:rPr>
@@ -15850,7 +15850,7 @@
                       <a:r>
                         <a:rPr sz="950" b="1">
                           <a:solidFill>
-                            <a:srgbClr val="1E293B"/>
+                            <a:srgbClr val="0F2942"/>
                           </a:solidFill>
                           <a:latin typeface="맑은 고딕"/>
                         </a:rPr>
@@ -15900,7 +15900,7 @@
                       <a:r>
                         <a:rPr sz="950" b="1">
                           <a:solidFill>
-                            <a:srgbClr val="1E293B"/>
+                            <a:srgbClr val="0F2942"/>
                           </a:solidFill>
                           <a:latin typeface="맑은 고딕"/>
                         </a:rPr>
@@ -15950,7 +15950,7 @@
                       <a:r>
                         <a:rPr sz="950" b="0">
                           <a:solidFill>
-                            <a:srgbClr val="1E293B"/>
+                            <a:srgbClr val="0F2942"/>
                           </a:solidFill>
                           <a:latin typeface="맑은 고딕"/>
                         </a:rPr>
@@ -16000,7 +16000,7 @@
                       <a:r>
                         <a:rPr sz="950" b="0">
                           <a:solidFill>
-                            <a:srgbClr val="1E293B"/>
+                            <a:srgbClr val="0F2942"/>
                           </a:solidFill>
                           <a:latin typeface="맑은 고딕"/>
                         </a:rPr>
@@ -16050,11 +16050,11 @@
                       <a:r>
                         <a:rPr sz="950" b="0">
                           <a:solidFill>
-                            <a:srgbClr val="1E293B"/>
+                            <a:srgbClr val="0F2942"/>
                           </a:solidFill>
                           <a:latin typeface="맑은 고딕"/>
                         </a:rPr>
-                        <a:t>규칙사전정의서(010), 프롬프트명세서(020), ProductLab연계명세서(030)</a:t>
+                        <a:t>규칙사전정의서(010), 프롬프트명세서(020), PLM-Nexus연계명세서(030)</a:t>
                       </a:r>
                     </a:p>
                   </a:txBody>
@@ -16100,7 +16100,7 @@
                       <a:r>
                         <a:rPr sz="950" b="0">
                           <a:solidFill>
-                            <a:srgbClr val="1E293B"/>
+                            <a:srgbClr val="0F2942"/>
                           </a:solidFill>
                           <a:latin typeface="맑은 고딕"/>
                         </a:rPr>
@@ -16152,7 +16152,7 @@
                       <a:r>
                         <a:rPr sz="950" b="1">
                           <a:solidFill>
-                            <a:srgbClr val="1E293B"/>
+                            <a:srgbClr val="0F2942"/>
                           </a:solidFill>
                           <a:latin typeface="맑은 고딕"/>
                         </a:rPr>
@@ -16202,7 +16202,7 @@
                       <a:r>
                         <a:rPr sz="950" b="1">
                           <a:solidFill>
-                            <a:srgbClr val="1E293B"/>
+                            <a:srgbClr val="0F2942"/>
                           </a:solidFill>
                           <a:latin typeface="맑은 고딕"/>
                         </a:rPr>
@@ -16252,7 +16252,7 @@
                       <a:r>
                         <a:rPr sz="950" b="0">
                           <a:solidFill>
-                            <a:srgbClr val="1E293B"/>
+                            <a:srgbClr val="0F2942"/>
                           </a:solidFill>
                           <a:latin typeface="맑은 고딕"/>
                         </a:rPr>
@@ -16302,7 +16302,7 @@
                       <a:r>
                         <a:rPr sz="950" b="0">
                           <a:solidFill>
-                            <a:srgbClr val="1E293B"/>
+                            <a:srgbClr val="0F2942"/>
                           </a:solidFill>
                           <a:latin typeface="맑은 고딕"/>
                         </a:rPr>
@@ -16352,7 +16352,7 @@
                       <a:r>
                         <a:rPr sz="950" b="0">
                           <a:solidFill>
-                            <a:srgbClr val="1E293B"/>
+                            <a:srgbClr val="0F2942"/>
                           </a:solidFill>
                           <a:latin typeface="맑은 고딕"/>
                         </a:rPr>
@@ -16402,7 +16402,7 @@
                       <a:r>
                         <a:rPr sz="950" b="0">
                           <a:solidFill>
-                            <a:srgbClr val="1E293B"/>
+                            <a:srgbClr val="0F2942"/>
                           </a:solidFill>
                           <a:latin typeface="맑은 고딕"/>
                         </a:rPr>
@@ -16454,7 +16454,7 @@
                       <a:r>
                         <a:rPr sz="950" b="1">
                           <a:solidFill>
-                            <a:srgbClr val="1E293B"/>
+                            <a:srgbClr val="0F2942"/>
                           </a:solidFill>
                           <a:latin typeface="맑은 고딕"/>
                         </a:rPr>
@@ -16504,7 +16504,7 @@
                       <a:r>
                         <a:rPr sz="950" b="1">
                           <a:solidFill>
-                            <a:srgbClr val="1E293B"/>
+                            <a:srgbClr val="0F2942"/>
                           </a:solidFill>
                           <a:latin typeface="맑은 고딕"/>
                         </a:rPr>
@@ -16554,7 +16554,7 @@
                       <a:r>
                         <a:rPr sz="950" b="0">
                           <a:solidFill>
-                            <a:srgbClr val="1E293B"/>
+                            <a:srgbClr val="0F2942"/>
                           </a:solidFill>
                           <a:latin typeface="맑은 고딕"/>
                         </a:rPr>
@@ -16604,7 +16604,7 @@
                       <a:r>
                         <a:rPr sz="950" b="0">
                           <a:solidFill>
-                            <a:srgbClr val="1E293B"/>
+                            <a:srgbClr val="0F2942"/>
                           </a:solidFill>
                           <a:latin typeface="맑은 고딕"/>
                         </a:rPr>
@@ -16654,7 +16654,7 @@
                       <a:r>
                         <a:rPr sz="950" b="0">
                           <a:solidFill>
-                            <a:srgbClr val="1E293B"/>
+                            <a:srgbClr val="0F2942"/>
                           </a:solidFill>
                           <a:latin typeface="맑은 고딕"/>
                         </a:rPr>
@@ -16704,7 +16704,7 @@
                       <a:r>
                         <a:rPr sz="950" b="0">
                           <a:solidFill>
-                            <a:srgbClr val="1E293B"/>
+                            <a:srgbClr val="0F2942"/>
                           </a:solidFill>
                           <a:latin typeface="맑은 고딕"/>
                         </a:rPr>
@@ -17052,7 +17052,7 @@
                 </a:solidFill>
                 <a:latin typeface="맑은 고딕"/>
               </a:rPr>
-              <a:t>한빛글로벌 SyncGuard AI 시스템 구축  |  문서관리 계획서</a:t>
+              <a:t>한빛글로벌 SyncFlow AI 시스템 구축  |  문서관리 계획서</a:t>
             </a:r>
           </a:p>
         </p:txBody>
@@ -17537,7 +17537,7 @@
                       <a:r>
                         <a:rPr sz="900" b="1">
                           <a:solidFill>
-                            <a:srgbClr val="1E293B"/>
+                            <a:srgbClr val="0F2942"/>
                           </a:solidFill>
                           <a:latin typeface="맑은 고딕"/>
                         </a:rPr>
@@ -17587,7 +17587,7 @@
                       <a:r>
                         <a:rPr sz="900" b="1">
                           <a:solidFill>
-                            <a:srgbClr val="1E293B"/>
+                            <a:srgbClr val="0F2942"/>
                           </a:solidFill>
                           <a:latin typeface="맑은 고딕"/>
                         </a:rPr>
@@ -17637,7 +17637,7 @@
                       <a:r>
                         <a:rPr sz="900" b="0">
                           <a:solidFill>
-                            <a:srgbClr val="1E293B"/>
+                            <a:srgbClr val="0F2942"/>
                           </a:solidFill>
                           <a:latin typeface="맑은 고딕"/>
                         </a:rPr>
@@ -17687,7 +17687,7 @@
                       <a:r>
                         <a:rPr sz="900" b="0">
                           <a:solidFill>
-                            <a:srgbClr val="1E293B"/>
+                            <a:srgbClr val="0F2942"/>
                           </a:solidFill>
                           <a:latin typeface="맑은 고딕"/>
                         </a:rPr>
@@ -17737,7 +17737,7 @@
                       <a:r>
                         <a:rPr sz="900" b="0">
                           <a:solidFill>
-                            <a:srgbClr val="1E293B"/>
+                            <a:srgbClr val="0F2942"/>
                           </a:solidFill>
                           <a:latin typeface="맑은 고딕"/>
                         </a:rPr>
@@ -17837,7 +17837,7 @@
                       <a:r>
                         <a:rPr sz="900" b="0">
                           <a:solidFill>
-                            <a:srgbClr val="1E293B"/>
+                            <a:srgbClr val="0F2942"/>
                           </a:solidFill>
                           <a:latin typeface="맑은 고딕"/>
                         </a:rPr>
@@ -17889,7 +17889,7 @@
                       <a:r>
                         <a:rPr sz="900" b="1">
                           <a:solidFill>
-                            <a:srgbClr val="1E293B"/>
+                            <a:srgbClr val="0F2942"/>
                           </a:solidFill>
                           <a:latin typeface="맑은 고딕"/>
                         </a:rPr>
@@ -17939,7 +17939,7 @@
                       <a:r>
                         <a:rPr sz="900" b="1">
                           <a:solidFill>
-                            <a:srgbClr val="1E293B"/>
+                            <a:srgbClr val="0F2942"/>
                           </a:solidFill>
                           <a:latin typeface="맑은 고딕"/>
                         </a:rPr>
@@ -17989,7 +17989,7 @@
                       <a:r>
                         <a:rPr sz="900" b="0">
                           <a:solidFill>
-                            <a:srgbClr val="1E293B"/>
+                            <a:srgbClr val="0F2942"/>
                           </a:solidFill>
                           <a:latin typeface="맑은 고딕"/>
                         </a:rPr>
@@ -18039,7 +18039,7 @@
                       <a:r>
                         <a:rPr sz="900" b="0">
                           <a:solidFill>
-                            <a:srgbClr val="1E293B"/>
+                            <a:srgbClr val="0F2942"/>
                           </a:solidFill>
                           <a:latin typeface="맑은 고딕"/>
                         </a:rPr>
@@ -18089,7 +18089,7 @@
                       <a:r>
                         <a:rPr sz="900" b="0">
                           <a:solidFill>
-                            <a:srgbClr val="1E293B"/>
+                            <a:srgbClr val="0F2942"/>
                           </a:solidFill>
                           <a:latin typeface="맑은 고딕"/>
                         </a:rPr>
@@ -18189,11 +18189,11 @@
                       <a:r>
                         <a:rPr sz="900" b="0">
                           <a:solidFill>
-                            <a:srgbClr val="1E293B"/>
+                            <a:srgbClr val="0F2942"/>
                           </a:solidFill>
                           <a:latin typeface="맑은 고딕"/>
                         </a:rPr>
-                        <a:t>현업 PM / RA Lab / 기술PM</a:t>
+                        <a:t>현업 PM / 품질법무검증팀 / 기술PM</a:t>
                       </a:r>
                     </a:p>
                   </a:txBody>
@@ -18241,7 +18241,7 @@
                       <a:r>
                         <a:rPr sz="900" b="1">
                           <a:solidFill>
-                            <a:srgbClr val="1E293B"/>
+                            <a:srgbClr val="0F2942"/>
                           </a:solidFill>
                           <a:latin typeface="맑은 고딕"/>
                         </a:rPr>
@@ -18291,7 +18291,7 @@
                       <a:r>
                         <a:rPr sz="900" b="1">
                           <a:solidFill>
-                            <a:srgbClr val="1E293B"/>
+                            <a:srgbClr val="0F2942"/>
                           </a:solidFill>
                           <a:latin typeface="맑은 고딕"/>
                         </a:rPr>
@@ -18341,7 +18341,7 @@
                       <a:r>
                         <a:rPr sz="900" b="0">
                           <a:solidFill>
-                            <a:srgbClr val="1E293B"/>
+                            <a:srgbClr val="0F2942"/>
                           </a:solidFill>
                           <a:latin typeface="맑은 고딕"/>
                         </a:rPr>
@@ -18391,7 +18391,7 @@
                       <a:r>
                         <a:rPr sz="900" b="0">
                           <a:solidFill>
-                            <a:srgbClr val="1E293B"/>
+                            <a:srgbClr val="0F2942"/>
                           </a:solidFill>
                           <a:latin typeface="맑은 고딕"/>
                         </a:rPr>
@@ -18441,7 +18441,7 @@
                       <a:r>
                         <a:rPr sz="900" b="0">
                           <a:solidFill>
-                            <a:srgbClr val="1E293B"/>
+                            <a:srgbClr val="0F2942"/>
                           </a:solidFill>
                           <a:latin typeface="맑은 고딕"/>
                         </a:rPr>
@@ -18541,11 +18541,11 @@
                       <a:r>
                         <a:rPr sz="900" b="0">
                           <a:solidFill>
-                            <a:srgbClr val="1E293B"/>
+                            <a:srgbClr val="0F2942"/>
                           </a:solidFill>
                           <a:latin typeface="맑은 고딕"/>
                         </a:rPr>
-                        <a:t>현업 PM / RA Lab 전원</a:t>
+                        <a:t>현업 PM / 품질법무검증팀 전원</a:t>
                       </a:r>
                     </a:p>
                   </a:txBody>
@@ -18593,7 +18593,7 @@
                       <a:r>
                         <a:rPr sz="900" b="1">
                           <a:solidFill>
-                            <a:srgbClr val="1E293B"/>
+                            <a:srgbClr val="0F2942"/>
                           </a:solidFill>
                           <a:latin typeface="맑은 고딕"/>
                         </a:rPr>
@@ -18643,7 +18643,7 @@
                       <a:r>
                         <a:rPr sz="900" b="1">
                           <a:solidFill>
-                            <a:srgbClr val="1E293B"/>
+                            <a:srgbClr val="0F2942"/>
                           </a:solidFill>
                           <a:latin typeface="맑은 고딕"/>
                         </a:rPr>
@@ -18693,7 +18693,7 @@
                       <a:r>
                         <a:rPr sz="900" b="0">
                           <a:solidFill>
-                            <a:srgbClr val="1E293B"/>
+                            <a:srgbClr val="0F2942"/>
                           </a:solidFill>
                           <a:latin typeface="맑은 고딕"/>
                         </a:rPr>
@@ -18743,7 +18743,7 @@
                       <a:r>
                         <a:rPr sz="900" b="0">
                           <a:solidFill>
-                            <a:srgbClr val="1E293B"/>
+                            <a:srgbClr val="0F2942"/>
                           </a:solidFill>
                           <a:latin typeface="맑은 고딕"/>
                         </a:rPr>
@@ -18793,7 +18793,7 @@
                       <a:r>
                         <a:rPr sz="900" b="0">
                           <a:solidFill>
-                            <a:srgbClr val="1E293B"/>
+                            <a:srgbClr val="0F2942"/>
                           </a:solidFill>
                           <a:latin typeface="맑은 고딕"/>
                         </a:rPr>
@@ -18893,7 +18893,7 @@
                       <a:r>
                         <a:rPr sz="900" b="0">
                           <a:solidFill>
-                            <a:srgbClr val="1E293B"/>
+                            <a:srgbClr val="0F2942"/>
                           </a:solidFill>
                           <a:latin typeface="맑은 고딕"/>
                         </a:rPr>
@@ -18945,7 +18945,7 @@
                       <a:r>
                         <a:rPr sz="900" b="1">
                           <a:solidFill>
-                            <a:srgbClr val="1E293B"/>
+                            <a:srgbClr val="0F2942"/>
                           </a:solidFill>
                           <a:latin typeface="맑은 고딕"/>
                         </a:rPr>
@@ -18995,7 +18995,7 @@
                       <a:r>
                         <a:rPr sz="900" b="1">
                           <a:solidFill>
-                            <a:srgbClr val="1E293B"/>
+                            <a:srgbClr val="0F2942"/>
                           </a:solidFill>
                           <a:latin typeface="맑은 고딕"/>
                         </a:rPr>
@@ -19045,11 +19045,11 @@
                       <a:r>
                         <a:rPr sz="900" b="0">
                           <a:solidFill>
-                            <a:srgbClr val="1E293B"/>
+                            <a:srgbClr val="0F2942"/>
                           </a:solidFill>
                           <a:latin typeface="맑은 고딕"/>
                         </a:rPr>
-                        <a:t>규칙사전정의서(010), AI 프롬프트명세서(020), ProductLab 실증연계명세서(030) + 응용프로그램 소스코드</a:t>
+                        <a:t>규칙사전정의서(010), AI 프롬프트명세서(020), PLM-Nexus 시험검증연계명세서(030) + 응용프로그램 소스코드</a:t>
                       </a:r>
                     </a:p>
                   </a:txBody>
@@ -19095,7 +19095,7 @@
                       <a:r>
                         <a:rPr sz="900" b="0">
                           <a:solidFill>
-                            <a:srgbClr val="1E293B"/>
+                            <a:srgbClr val="0F2942"/>
                           </a:solidFill>
                           <a:latin typeface="맑은 고딕"/>
                         </a:rPr>
@@ -19145,7 +19145,7 @@
                       <a:r>
                         <a:rPr sz="900" b="0">
                           <a:solidFill>
-                            <a:srgbClr val="1E293B"/>
+                            <a:srgbClr val="0F2942"/>
                           </a:solidFill>
                           <a:latin typeface="맑은 고딕"/>
                         </a:rPr>
@@ -19245,11 +19245,11 @@
                       <a:r>
                         <a:rPr sz="900" b="0">
                           <a:solidFill>
-                            <a:srgbClr val="1E293B"/>
+                            <a:srgbClr val="0F2942"/>
                           </a:solidFill>
                           <a:latin typeface="맑은 고딕"/>
                         </a:rPr>
-                        <a:t>RA Lab / 기술원 / 기술PM</a:t>
+                        <a:t>품질법무검증팀 / 기술원 / 기술PM</a:t>
                       </a:r>
                     </a:p>
                   </a:txBody>
@@ -19297,7 +19297,7 @@
                       <a:r>
                         <a:rPr sz="900" b="1">
                           <a:solidFill>
-                            <a:srgbClr val="1E293B"/>
+                            <a:srgbClr val="0F2942"/>
                           </a:solidFill>
                           <a:latin typeface="맑은 고딕"/>
                         </a:rPr>
@@ -19347,7 +19347,7 @@
                       <a:r>
                         <a:rPr sz="900" b="1">
                           <a:solidFill>
-                            <a:srgbClr val="1E293B"/>
+                            <a:srgbClr val="0F2942"/>
                           </a:solidFill>
                           <a:latin typeface="맑은 고딕"/>
                         </a:rPr>
@@ -19397,7 +19397,7 @@
                       <a:r>
                         <a:rPr sz="900" b="0">
                           <a:solidFill>
-                            <a:srgbClr val="1E293B"/>
+                            <a:srgbClr val="0F2942"/>
                           </a:solidFill>
                           <a:latin typeface="맑은 고딕"/>
                         </a:rPr>
@@ -19447,7 +19447,7 @@
                       <a:r>
                         <a:rPr sz="900" b="0">
                           <a:solidFill>
-                            <a:srgbClr val="1E293B"/>
+                            <a:srgbClr val="0F2942"/>
                           </a:solidFill>
                           <a:latin typeface="맑은 고딕"/>
                         </a:rPr>
@@ -19497,7 +19497,7 @@
                       <a:r>
                         <a:rPr sz="900" b="0">
                           <a:solidFill>
-                            <a:srgbClr val="1E293B"/>
+                            <a:srgbClr val="0F2942"/>
                           </a:solidFill>
                           <a:latin typeface="맑은 고딕"/>
                         </a:rPr>
@@ -19597,11 +19597,11 @@
                       <a:r>
                         <a:rPr sz="900" b="0">
                           <a:solidFill>
-                            <a:srgbClr val="1E293B"/>
+                            <a:srgbClr val="0F2942"/>
                           </a:solidFill>
                           <a:latin typeface="맑은 고딕"/>
                         </a:rPr>
-                        <a:t>발주사 PM / 보안팀 / RA</a:t>
+                        <a:t>발주사 PM / 보안팀 / QA</a:t>
                       </a:r>
                     </a:p>
                   </a:txBody>
@@ -19649,7 +19649,7 @@
                       <a:r>
                         <a:rPr sz="900" b="1">
                           <a:solidFill>
-                            <a:srgbClr val="1E293B"/>
+                            <a:srgbClr val="0F2942"/>
                           </a:solidFill>
                           <a:latin typeface="맑은 고딕"/>
                         </a:rPr>
@@ -19699,7 +19699,7 @@
                       <a:r>
                         <a:rPr sz="900" b="1">
                           <a:solidFill>
-                            <a:srgbClr val="1E293B"/>
+                            <a:srgbClr val="0F2942"/>
                           </a:solidFill>
                           <a:latin typeface="맑은 고딕"/>
                         </a:rPr>
@@ -19749,7 +19749,7 @@
                       <a:r>
                         <a:rPr sz="900" b="0">
                           <a:solidFill>
-                            <a:srgbClr val="1E293B"/>
+                            <a:srgbClr val="0F2942"/>
                           </a:solidFill>
                           <a:latin typeface="맑은 고딕"/>
                         </a:rPr>
@@ -19799,7 +19799,7 @@
                       <a:r>
                         <a:rPr sz="900" b="0">
                           <a:solidFill>
-                            <a:srgbClr val="1E293B"/>
+                            <a:srgbClr val="0F2942"/>
                           </a:solidFill>
                           <a:latin typeface="맑은 고딕"/>
                         </a:rPr>
@@ -19849,7 +19849,7 @@
                       <a:r>
                         <a:rPr sz="900" b="0">
                           <a:solidFill>
-                            <a:srgbClr val="1E293B"/>
+                            <a:srgbClr val="0F2942"/>
                           </a:solidFill>
                           <a:latin typeface="맑은 고딕"/>
                         </a:rPr>
@@ -19949,7 +19949,7 @@
                       <a:r>
                         <a:rPr sz="900" b="0">
                           <a:solidFill>
-                            <a:srgbClr val="1E293B"/>
+                            <a:srgbClr val="0F2942"/>
                           </a:solidFill>
                           <a:latin typeface="맑은 고딕"/>
                         </a:rPr>
@@ -20001,7 +20001,7 @@
                       <a:r>
                         <a:rPr sz="900" b="1">
                           <a:solidFill>
-                            <a:srgbClr val="1E293B"/>
+                            <a:srgbClr val="0F2942"/>
                           </a:solidFill>
                           <a:latin typeface="맑은 고딕"/>
                         </a:rPr>
@@ -20051,7 +20051,7 @@
                       <a:r>
                         <a:rPr sz="900" b="1">
                           <a:solidFill>
-                            <a:srgbClr val="1E293B"/>
+                            <a:srgbClr val="0F2942"/>
                           </a:solidFill>
                           <a:latin typeface="맑은 고딕"/>
                         </a:rPr>
@@ -20101,7 +20101,7 @@
                       <a:r>
                         <a:rPr sz="900" b="0">
                           <a:solidFill>
-                            <a:srgbClr val="1E293B"/>
+                            <a:srgbClr val="0F2942"/>
                           </a:solidFill>
                           <a:latin typeface="맑은 고딕"/>
                         </a:rPr>
@@ -20151,7 +20151,7 @@
                       <a:r>
                         <a:rPr sz="900" b="0">
                           <a:solidFill>
-                            <a:srgbClr val="1E293B"/>
+                            <a:srgbClr val="0F2942"/>
                           </a:solidFill>
                           <a:latin typeface="맑은 고딕"/>
                         </a:rPr>
@@ -20201,7 +20201,7 @@
                       <a:r>
                         <a:rPr sz="900" b="0">
                           <a:solidFill>
-                            <a:srgbClr val="1E293B"/>
+                            <a:srgbClr val="0F2942"/>
                           </a:solidFill>
                           <a:latin typeface="맑은 고딕"/>
                         </a:rPr>
@@ -20301,7 +20301,7 @@
                       <a:r>
                         <a:rPr sz="900" b="0">
                           <a:solidFill>
-                            <a:srgbClr val="1E293B"/>
+                            <a:srgbClr val="0F2942"/>
                           </a:solidFill>
                           <a:latin typeface="맑은 고딕"/>
                         </a:rPr>
@@ -20649,7 +20649,7 @@
                 </a:solidFill>
                 <a:latin typeface="맑은 고딕"/>
               </a:rPr>
-              <a:t>한빛글로벌 SyncGuard AI 시스템 구축  |  문서관리 계획서</a:t>
+              <a:t>한빛글로벌 SyncFlow AI 시스템 구축  |  문서관리 계획서</a:t>
             </a:r>
           </a:p>
         </p:txBody>
@@ -20953,7 +20953,7 @@
             <a:r>
               <a:rPr sz="980" b="0">
                 <a:solidFill>
-                  <a:srgbClr val="1E293B"/>
+                  <a:srgbClr val="0F2942"/>
                 </a:solidFill>
                 <a:latin typeface="맑은 고딕"/>
               </a:rPr>
@@ -20972,7 +20972,7 @@
             <a:r>
               <a:rPr sz="980" b="0">
                 <a:solidFill>
-                  <a:srgbClr val="1E293B"/>
+                  <a:srgbClr val="0F2942"/>
                 </a:solidFill>
                 <a:latin typeface="맑은 고딕"/>
               </a:rPr>
@@ -20991,7 +20991,7 @@
             <a:r>
               <a:rPr sz="980" b="0">
                 <a:solidFill>
-                  <a:srgbClr val="1E293B"/>
+                  <a:srgbClr val="0F2942"/>
                 </a:solidFill>
                 <a:latin typeface="맑은 고딕"/>
               </a:rPr>
@@ -21010,7 +21010,7 @@
             <a:r>
               <a:rPr sz="980" b="0">
                 <a:solidFill>
-                  <a:srgbClr val="1E293B"/>
+                  <a:srgbClr val="0F2942"/>
                 </a:solidFill>
                 <a:latin typeface="맑은 고딕"/>
               </a:rPr>
@@ -21029,7 +21029,7 @@
             <a:r>
               <a:rPr sz="980" b="0">
                 <a:solidFill>
-                  <a:srgbClr val="1E293B"/>
+                  <a:srgbClr val="0F2942"/>
                 </a:solidFill>
                 <a:latin typeface="맑은 고딕"/>
               </a:rPr>
@@ -21048,7 +21048,7 @@
             <a:r>
               <a:rPr sz="980" b="0">
                 <a:solidFill>
-                  <a:srgbClr val="1E293B"/>
+                  <a:srgbClr val="0F2942"/>
                 </a:solidFill>
                 <a:latin typeface="맑은 고딕"/>
               </a:rPr>
@@ -21067,7 +21067,7 @@
             <a:r>
               <a:rPr sz="980" b="0">
                 <a:solidFill>
-                  <a:srgbClr val="1E293B"/>
+                  <a:srgbClr val="0F2942"/>
                 </a:solidFill>
                 <a:latin typeface="맑은 고딕"/>
               </a:rPr>
@@ -21086,7 +21086,7 @@
             <a:r>
               <a:rPr sz="980" b="0">
                 <a:solidFill>
-                  <a:srgbClr val="1E293B"/>
+                  <a:srgbClr val="0F2942"/>
                 </a:solidFill>
                 <a:latin typeface="맑은 고딕"/>
               </a:rPr>
@@ -21105,7 +21105,7 @@
             <a:r>
               <a:rPr sz="980" b="0">
                 <a:solidFill>
-                  <a:srgbClr val="1E293B"/>
+                  <a:srgbClr val="0F2942"/>
                 </a:solidFill>
                 <a:latin typeface="맑은 고딕"/>
               </a:rPr>
@@ -21124,7 +21124,7 @@
             <a:r>
               <a:rPr sz="980" b="0">
                 <a:solidFill>
-                  <a:srgbClr val="1E293B"/>
+                  <a:srgbClr val="0F2942"/>
                 </a:solidFill>
                 <a:latin typeface="맑은 고딕"/>
               </a:rPr>
@@ -21348,7 +21348,7 @@
             <a:r>
               <a:rPr sz="980" b="0">
                 <a:solidFill>
-                  <a:srgbClr val="1E293B"/>
+                  <a:srgbClr val="0F2942"/>
                 </a:solidFill>
                 <a:latin typeface="맑은 고딕"/>
               </a:rPr>
@@ -21367,7 +21367,7 @@
             <a:r>
               <a:rPr sz="980" b="0">
                 <a:solidFill>
-                  <a:srgbClr val="1E293B"/>
+                  <a:srgbClr val="0F2942"/>
                 </a:solidFill>
                 <a:latin typeface="맑은 고딕"/>
               </a:rPr>
@@ -21386,7 +21386,7 @@
             <a:r>
               <a:rPr sz="980" b="0">
                 <a:solidFill>
-                  <a:srgbClr val="1E293B"/>
+                  <a:srgbClr val="0F2942"/>
                 </a:solidFill>
                 <a:latin typeface="맑은 고딕"/>
               </a:rPr>
@@ -21405,7 +21405,7 @@
             <a:r>
               <a:rPr sz="980" b="0">
                 <a:solidFill>
-                  <a:srgbClr val="1E293B"/>
+                  <a:srgbClr val="0F2942"/>
                 </a:solidFill>
                 <a:latin typeface="맑은 고딕"/>
               </a:rPr>
@@ -21424,7 +21424,7 @@
             <a:r>
               <a:rPr sz="980" b="0">
                 <a:solidFill>
-                  <a:srgbClr val="1E293B"/>
+                  <a:srgbClr val="0F2942"/>
                 </a:solidFill>
                 <a:latin typeface="맑은 고딕"/>
               </a:rPr>
@@ -21443,7 +21443,7 @@
             <a:r>
               <a:rPr sz="980" b="0">
                 <a:solidFill>
-                  <a:srgbClr val="1E293B"/>
+                  <a:srgbClr val="0F2942"/>
                 </a:solidFill>
                 <a:latin typeface="맑은 고딕"/>
               </a:rPr>
@@ -21462,7 +21462,7 @@
             <a:r>
               <a:rPr sz="980" b="0">
                 <a:solidFill>
-                  <a:srgbClr val="1E293B"/>
+                  <a:srgbClr val="0F2942"/>
                 </a:solidFill>
                 <a:latin typeface="맑은 고딕"/>
               </a:rPr>
@@ -21481,7 +21481,7 @@
             <a:r>
               <a:rPr sz="980" b="0">
                 <a:solidFill>
-                  <a:srgbClr val="1E293B"/>
+                  <a:srgbClr val="0F2942"/>
                 </a:solidFill>
                 <a:latin typeface="맑은 고딕"/>
               </a:rPr>
@@ -21500,7 +21500,7 @@
             <a:r>
               <a:rPr sz="980" b="0">
                 <a:solidFill>
-                  <a:srgbClr val="1E293B"/>
+                  <a:srgbClr val="0F2942"/>
                 </a:solidFill>
                 <a:latin typeface="맑은 고딕"/>
               </a:rPr>
@@ -21519,7 +21519,7 @@
             <a:r>
               <a:rPr sz="980" b="0">
                 <a:solidFill>
-                  <a:srgbClr val="1E293B"/>
+                  <a:srgbClr val="0F2942"/>
                 </a:solidFill>
                 <a:latin typeface="맑은 고딕"/>
               </a:rPr>
@@ -21743,7 +21743,7 @@
             <a:r>
               <a:rPr sz="980" b="0">
                 <a:solidFill>
-                  <a:srgbClr val="1E293B"/>
+                  <a:srgbClr val="0F2942"/>
                 </a:solidFill>
                 <a:latin typeface="맑은 고딕"/>
               </a:rPr>
@@ -21762,7 +21762,7 @@
             <a:r>
               <a:rPr sz="980" b="0">
                 <a:solidFill>
-                  <a:srgbClr val="1E293B"/>
+                  <a:srgbClr val="0F2942"/>
                 </a:solidFill>
                 <a:latin typeface="맑은 고딕"/>
               </a:rPr>
@@ -21781,7 +21781,7 @@
             <a:r>
               <a:rPr sz="980" b="0">
                 <a:solidFill>
-                  <a:srgbClr val="1E293B"/>
+                  <a:srgbClr val="0F2942"/>
                 </a:solidFill>
                 <a:latin typeface="맑은 고딕"/>
               </a:rPr>
@@ -21800,7 +21800,7 @@
             <a:r>
               <a:rPr sz="980" b="0">
                 <a:solidFill>
-                  <a:srgbClr val="1E293B"/>
+                  <a:srgbClr val="0F2942"/>
                 </a:solidFill>
                 <a:latin typeface="맑은 고딕"/>
               </a:rPr>
@@ -21819,7 +21819,7 @@
             <a:r>
               <a:rPr sz="980" b="0">
                 <a:solidFill>
-                  <a:srgbClr val="1E293B"/>
+                  <a:srgbClr val="0F2942"/>
                 </a:solidFill>
                 <a:latin typeface="맑은 고딕"/>
               </a:rPr>
@@ -21838,7 +21838,7 @@
             <a:r>
               <a:rPr sz="980" b="0">
                 <a:solidFill>
-                  <a:srgbClr val="1E293B"/>
+                  <a:srgbClr val="0F2942"/>
                 </a:solidFill>
                 <a:latin typeface="맑은 고딕"/>
               </a:rPr>
@@ -21857,7 +21857,7 @@
             <a:r>
               <a:rPr sz="980" b="0">
                 <a:solidFill>
-                  <a:srgbClr val="1E293B"/>
+                  <a:srgbClr val="0F2942"/>
                 </a:solidFill>
                 <a:latin typeface="맑은 고딕"/>
               </a:rPr>
@@ -21876,7 +21876,7 @@
             <a:r>
               <a:rPr sz="980" b="0">
                 <a:solidFill>
-                  <a:srgbClr val="1E293B"/>
+                  <a:srgbClr val="0F2942"/>
                 </a:solidFill>
                 <a:latin typeface="맑은 고딕"/>
               </a:rPr>
@@ -21895,11 +21895,11 @@
             <a:r>
               <a:rPr sz="980" b="0">
                 <a:solidFill>
-                  <a:srgbClr val="1E293B"/>
+                  <a:srgbClr val="0F2942"/>
                 </a:solidFill>
                 <a:latin typeface="맑은 고딕"/>
               </a:rPr>
-              <a:t>• 하단 푸터 : 한빛글로벌 SyncGuard AI | 대외비 | 페이지 번호 | 발주사·수행사 명시</a:t>
+              <a:t>• 하단 푸터 : 한빛글로벌 SyncFlow AI | 대외비 | 페이지 번호 | 발주사·수행사 명시</a:t>
             </a:r>
           </a:p>
         </p:txBody>
@@ -22343,7 +22343,7 @@
                 </a:solidFill>
                 <a:latin typeface="맑은 고딕"/>
               </a:rPr>
-              <a:t>한빛글로벌 SyncGuard AI 시스템 구축  |  문서관리 계획서</a:t>
+              <a:t>한빛글로벌 SyncFlow AI 시스템 구축  |  문서관리 계획서</a:t>
             </a:r>
           </a:p>
         </p:txBody>
@@ -22647,7 +22647,7 @@
             <a:r>
               <a:rPr sz="919" b="0">
                 <a:solidFill>
-                  <a:srgbClr val="1E293B"/>
+                  <a:srgbClr val="0F2942"/>
                 </a:solidFill>
                 <a:latin typeface="맑은 고딕"/>
               </a:rPr>
@@ -22666,7 +22666,7 @@
             <a:r>
               <a:rPr sz="919" b="0">
                 <a:solidFill>
-                  <a:srgbClr val="1E293B"/>
+                  <a:srgbClr val="0F2942"/>
                 </a:solidFill>
                 <a:latin typeface="맑은 고딕"/>
               </a:rPr>
@@ -22685,7 +22685,7 @@
             <a:r>
               <a:rPr sz="919" b="0">
                 <a:solidFill>
-                  <a:srgbClr val="1E293B"/>
+                  <a:srgbClr val="0F2942"/>
                 </a:solidFill>
                 <a:latin typeface="맑은 고딕"/>
               </a:rPr>
@@ -22704,7 +22704,7 @@
             <a:r>
               <a:rPr sz="919" b="0">
                 <a:solidFill>
-                  <a:srgbClr val="1E293B"/>
+                  <a:srgbClr val="0F2942"/>
                 </a:solidFill>
                 <a:latin typeface="맑은 고딕"/>
               </a:rPr>
@@ -22723,7 +22723,7 @@
             <a:r>
               <a:rPr sz="919" b="0">
                 <a:solidFill>
-                  <a:srgbClr val="1E293B"/>
+                  <a:srgbClr val="0F2942"/>
                 </a:solidFill>
                 <a:latin typeface="맑은 고딕"/>
               </a:rPr>
@@ -22742,7 +22742,7 @@
             <a:r>
               <a:rPr sz="919" b="0">
                 <a:solidFill>
-                  <a:srgbClr val="1E293B"/>
+                  <a:srgbClr val="0F2942"/>
                 </a:solidFill>
                 <a:latin typeface="맑은 고딕"/>
               </a:rPr>
@@ -22966,7 +22966,7 @@
             <a:r>
               <a:rPr sz="919" b="0">
                 <a:solidFill>
-                  <a:srgbClr val="1E293B"/>
+                  <a:srgbClr val="0F2942"/>
                 </a:solidFill>
                 <a:latin typeface="맑은 고딕"/>
               </a:rPr>
@@ -22985,7 +22985,7 @@
             <a:r>
               <a:rPr sz="919" b="0">
                 <a:solidFill>
-                  <a:srgbClr val="1E293B"/>
+                  <a:srgbClr val="0F2942"/>
                 </a:solidFill>
                 <a:latin typeface="맑은 고딕"/>
               </a:rPr>
@@ -23004,7 +23004,7 @@
             <a:r>
               <a:rPr sz="919" b="0">
                 <a:solidFill>
-                  <a:srgbClr val="1E293B"/>
+                  <a:srgbClr val="0F2942"/>
                 </a:solidFill>
                 <a:latin typeface="맑은 고딕"/>
               </a:rPr>
@@ -23023,7 +23023,7 @@
             <a:r>
               <a:rPr sz="919" b="0">
                 <a:solidFill>
-                  <a:srgbClr val="1E293B"/>
+                  <a:srgbClr val="0F2942"/>
                 </a:solidFill>
                 <a:latin typeface="맑은 고딕"/>
               </a:rPr>
@@ -23042,7 +23042,7 @@
             <a:r>
               <a:rPr sz="919" b="0">
                 <a:solidFill>
-                  <a:srgbClr val="1E293B"/>
+                  <a:srgbClr val="0F2942"/>
                 </a:solidFill>
                 <a:latin typeface="맑은 고딕"/>
               </a:rPr>
@@ -23061,7 +23061,7 @@
             <a:r>
               <a:rPr sz="919" b="0">
                 <a:solidFill>
-                  <a:srgbClr val="1E293B"/>
+                  <a:srgbClr val="0F2942"/>
                 </a:solidFill>
                 <a:latin typeface="맑은 고딕"/>
               </a:rPr>
@@ -23285,7 +23285,7 @@
             <a:r>
               <a:rPr sz="919" b="0">
                 <a:solidFill>
-                  <a:srgbClr val="1E293B"/>
+                  <a:srgbClr val="0F2942"/>
                 </a:solidFill>
                 <a:latin typeface="맑은 고딕"/>
               </a:rPr>
@@ -23304,7 +23304,7 @@
             <a:r>
               <a:rPr sz="919" b="0">
                 <a:solidFill>
-                  <a:srgbClr val="1E293B"/>
+                  <a:srgbClr val="0F2942"/>
                 </a:solidFill>
                 <a:latin typeface="맑은 고딕"/>
               </a:rPr>
@@ -23323,7 +23323,7 @@
             <a:r>
               <a:rPr sz="919" b="0">
                 <a:solidFill>
-                  <a:srgbClr val="1E293B"/>
+                  <a:srgbClr val="0F2942"/>
                 </a:solidFill>
                 <a:latin typeface="맑은 고딕"/>
               </a:rPr>
@@ -23342,7 +23342,7 @@
             <a:r>
               <a:rPr sz="919" b="0">
                 <a:solidFill>
-                  <a:srgbClr val="1E293B"/>
+                  <a:srgbClr val="0F2942"/>
                 </a:solidFill>
                 <a:latin typeface="맑은 고딕"/>
               </a:rPr>
@@ -23361,7 +23361,7 @@
             <a:r>
               <a:rPr sz="919" b="0">
                 <a:solidFill>
-                  <a:srgbClr val="1E293B"/>
+                  <a:srgbClr val="0F2942"/>
                 </a:solidFill>
                 <a:latin typeface="맑은 고딕"/>
               </a:rPr>
@@ -23380,7 +23380,7 @@
             <a:r>
               <a:rPr sz="919" b="0">
                 <a:solidFill>
-                  <a:srgbClr val="1E293B"/>
+                  <a:srgbClr val="0F2942"/>
                 </a:solidFill>
                 <a:latin typeface="맑은 고딕"/>
               </a:rPr>
@@ -23604,7 +23604,7 @@
             <a:r>
               <a:rPr sz="919" b="0">
                 <a:solidFill>
-                  <a:srgbClr val="1E293B"/>
+                  <a:srgbClr val="0F2942"/>
                 </a:solidFill>
                 <a:latin typeface="맑은 고딕"/>
               </a:rPr>
@@ -23623,11 +23623,11 @@
             <a:r>
               <a:rPr sz="919" b="0">
                 <a:solidFill>
-                  <a:srgbClr val="1E293B"/>
+                  <a:srgbClr val="0F2942"/>
                 </a:solidFill>
                 <a:latin typeface="맑은 고딕"/>
               </a:rPr>
-              <a:t>현업/기술PM · RA Lab]</a:t>
+              <a:t>현업/기술PM · 품질법무검증팀]</a:t>
             </a:r>
           </a:p>
           <a:p>
@@ -23642,7 +23642,7 @@
             <a:r>
               <a:rPr sz="919" b="0">
                 <a:solidFill>
-                  <a:srgbClr val="1E293B"/>
+                  <a:srgbClr val="0F2942"/>
                 </a:solidFill>
                 <a:latin typeface="맑은 고딕"/>
               </a:rPr>
@@ -23661,7 +23661,7 @@
             <a:r>
               <a:rPr sz="919" b="0">
                 <a:solidFill>
-                  <a:srgbClr val="1E293B"/>
+                  <a:srgbClr val="0F2942"/>
                 </a:solidFill>
                 <a:latin typeface="맑은 고딕"/>
               </a:rPr>
@@ -23680,11 +23680,11 @@
             <a:r>
               <a:rPr sz="919" b="0">
                 <a:solidFill>
-                  <a:srgbClr val="1E293B"/>
+                  <a:srgbClr val="0F2942"/>
                 </a:solidFill>
                 <a:latin typeface="맑은 고딕"/>
               </a:rPr>
-              <a:t>• 현업(RA 4인) 및 정보전략팀 실무 검토</a:t>
+              <a:t>• 현업(QA 4인) 및 정보전략팀 실무 검토</a:t>
             </a:r>
           </a:p>
           <a:p>
@@ -23699,7 +23699,7 @@
             <a:r>
               <a:rPr sz="919" b="0">
                 <a:solidFill>
-                  <a:srgbClr val="1E293B"/>
+                  <a:srgbClr val="0F2942"/>
                 </a:solidFill>
                 <a:latin typeface="맑은 고딕"/>
               </a:rPr>
@@ -23923,7 +23923,7 @@
             <a:r>
               <a:rPr sz="919" b="0">
                 <a:solidFill>
-                  <a:srgbClr val="1E293B"/>
+                  <a:srgbClr val="0F2942"/>
                 </a:solidFill>
                 <a:latin typeface="맑은 고딕"/>
               </a:rPr>
@@ -23942,7 +23942,7 @@
             <a:r>
               <a:rPr sz="919" b="0">
                 <a:solidFill>
-                  <a:srgbClr val="1E293B"/>
+                  <a:srgbClr val="0F2942"/>
                 </a:solidFill>
                 <a:latin typeface="맑은 고딕"/>
               </a:rPr>
@@ -23961,7 +23961,7 @@
             <a:r>
               <a:rPr sz="919" b="0">
                 <a:solidFill>
-                  <a:srgbClr val="1E293B"/>
+                  <a:srgbClr val="0F2942"/>
                 </a:solidFill>
                 <a:latin typeface="맑은 고딕"/>
               </a:rPr>
@@ -23980,7 +23980,7 @@
             <a:r>
               <a:rPr sz="919" b="0">
                 <a:solidFill>
-                  <a:srgbClr val="1E293B"/>
+                  <a:srgbClr val="0F2942"/>
                 </a:solidFill>
                 <a:latin typeface="맑은 고딕"/>
               </a:rPr>
@@ -23999,7 +23999,7 @@
             <a:r>
               <a:rPr sz="919" b="0">
                 <a:solidFill>
-                  <a:srgbClr val="1E293B"/>
+                  <a:srgbClr val="0F2942"/>
                 </a:solidFill>
                 <a:latin typeface="맑은 고딕"/>
               </a:rPr>
@@ -24018,7 +24018,7 @@
             <a:r>
               <a:rPr sz="919" b="0">
                 <a:solidFill>
-                  <a:srgbClr val="1E293B"/>
+                  <a:srgbClr val="0F2942"/>
                 </a:solidFill>
                 <a:latin typeface="맑은 고딕"/>
               </a:rPr>
@@ -24321,7 +24321,7 @@
                       <a:r>
                         <a:rPr sz="950" b="1">
                           <a:solidFill>
-                            <a:srgbClr val="1E293B"/>
+                            <a:srgbClr val="0F2942"/>
                           </a:solidFill>
                           <a:latin typeface="맑은 고딕"/>
                         </a:rPr>
@@ -24371,7 +24371,7 @@
                       <a:r>
                         <a:rPr sz="950" b="0">
                           <a:solidFill>
-                            <a:srgbClr val="1E293B"/>
+                            <a:srgbClr val="0F2942"/>
                           </a:solidFill>
                           <a:latin typeface="맑은 고딕"/>
                         </a:rPr>
@@ -24421,7 +24421,7 @@
                       <a:r>
                         <a:rPr sz="950" b="0">
                           <a:solidFill>
-                            <a:srgbClr val="1E293B"/>
+                            <a:srgbClr val="0F2942"/>
                           </a:solidFill>
                           <a:latin typeface="맑은 고딕"/>
                         </a:rPr>
@@ -24471,7 +24471,7 @@
                       <a:r>
                         <a:rPr sz="950" b="0">
                           <a:solidFill>
-                            <a:srgbClr val="1E293B"/>
+                            <a:srgbClr val="0F2942"/>
                           </a:solidFill>
                           <a:latin typeface="맑은 고딕"/>
                         </a:rPr>
@@ -24521,7 +24521,7 @@
                       <a:r>
                         <a:rPr sz="950" b="0">
                           <a:solidFill>
-                            <a:srgbClr val="1E293B"/>
+                            <a:srgbClr val="0F2942"/>
                           </a:solidFill>
                           <a:latin typeface="맑은 고딕"/>
                         </a:rPr>
@@ -24573,7 +24573,7 @@
                       <a:r>
                         <a:rPr sz="950" b="1">
                           <a:solidFill>
-                            <a:srgbClr val="1E293B"/>
+                            <a:srgbClr val="0F2942"/>
                           </a:solidFill>
                           <a:latin typeface="맑은 고딕"/>
                         </a:rPr>
@@ -24623,7 +24623,7 @@
                       <a:r>
                         <a:rPr sz="950" b="0">
                           <a:solidFill>
-                            <a:srgbClr val="1E293B"/>
+                            <a:srgbClr val="0F2942"/>
                           </a:solidFill>
                           <a:latin typeface="맑은 고딕"/>
                         </a:rPr>
@@ -24673,7 +24673,7 @@
                       <a:r>
                         <a:rPr sz="950" b="0">
                           <a:solidFill>
-                            <a:srgbClr val="1E293B"/>
+                            <a:srgbClr val="0F2942"/>
                           </a:solidFill>
                           <a:latin typeface="맑은 고딕"/>
                         </a:rPr>
@@ -24723,7 +24723,7 @@
                       <a:r>
                         <a:rPr sz="950" b="0">
                           <a:solidFill>
-                            <a:srgbClr val="1E293B"/>
+                            <a:srgbClr val="0F2942"/>
                           </a:solidFill>
                           <a:latin typeface="맑은 고딕"/>
                         </a:rPr>
@@ -24773,7 +24773,7 @@
                       <a:r>
                         <a:rPr sz="950" b="0">
                           <a:solidFill>
-                            <a:srgbClr val="1E293B"/>
+                            <a:srgbClr val="0F2942"/>
                           </a:solidFill>
                           <a:latin typeface="맑은 고딕"/>
                         </a:rPr>
@@ -24825,7 +24825,7 @@
                       <a:r>
                         <a:rPr sz="950" b="1">
                           <a:solidFill>
-                            <a:srgbClr val="1E293B"/>
+                            <a:srgbClr val="0F2942"/>
                           </a:solidFill>
                           <a:latin typeface="맑은 고딕"/>
                         </a:rPr>
@@ -24875,7 +24875,7 @@
                       <a:r>
                         <a:rPr sz="950" b="0">
                           <a:solidFill>
-                            <a:srgbClr val="1E293B"/>
+                            <a:srgbClr val="0F2942"/>
                           </a:solidFill>
                           <a:latin typeface="맑은 고딕"/>
                         </a:rPr>
@@ -24925,11 +24925,11 @@
                       <a:r>
                         <a:rPr sz="950" b="0">
                           <a:solidFill>
-                            <a:srgbClr val="1E293B"/>
+                            <a:srgbClr val="0F2942"/>
                           </a:solidFill>
                           <a:latin typeface="맑은 고딕"/>
                         </a:rPr>
-                        <a:t>발주사 PM(정민수/한승우), RA Lab, 수행 PM</a:t>
+                        <a:t>발주사 PM(정민수/한승우), 품질법무검증팀, 수행 PM</a:t>
                       </a:r>
                     </a:p>
                   </a:txBody>
@@ -24975,7 +24975,7 @@
                       <a:r>
                         <a:rPr sz="950" b="0">
                           <a:solidFill>
-                            <a:srgbClr val="1E293B"/>
+                            <a:srgbClr val="0F2942"/>
                           </a:solidFill>
                           <a:latin typeface="맑은 고딕"/>
                         </a:rPr>
@@ -25025,7 +25025,7 @@
                       <a:r>
                         <a:rPr sz="950" b="0">
                           <a:solidFill>
-                            <a:srgbClr val="1E293B"/>
+                            <a:srgbClr val="0F2942"/>
                           </a:solidFill>
                           <a:latin typeface="맑은 고딕"/>
                         </a:rPr>
@@ -25373,7 +25373,7 @@
                 </a:solidFill>
                 <a:latin typeface="맑은 고딕"/>
               </a:rPr>
-              <a:t>한빛글로벌 SyncGuard AI 시스템 구축  |  문서관리 계획서</a:t>
+              <a:t>한빛글로벌 SyncFlow AI 시스템 구축  |  문서관리 계획서</a:t>
             </a:r>
           </a:p>
         </p:txBody>
@@ -25756,7 +25756,7 @@
                       <a:r>
                         <a:rPr sz="900" b="1">
                           <a:solidFill>
-                            <a:srgbClr val="1E293B"/>
+                            <a:srgbClr val="0F2942"/>
                           </a:solidFill>
                           <a:latin typeface="맑은 고딕"/>
                         </a:rPr>
@@ -25806,7 +25806,7 @@
                       <a:r>
                         <a:rPr sz="900" b="1">
                           <a:solidFill>
-                            <a:srgbClr val="1E293B"/>
+                            <a:srgbClr val="0F2942"/>
                           </a:solidFill>
                           <a:latin typeface="맑은 고딕"/>
                         </a:rPr>
@@ -25856,7 +25856,7 @@
                       <a:r>
                         <a:rPr sz="900" b="0">
                           <a:solidFill>
-                            <a:srgbClr val="1E293B"/>
+                            <a:srgbClr val="0F2942"/>
                           </a:solidFill>
                           <a:latin typeface="맑은 고딕"/>
                         </a:rPr>
@@ -25906,7 +25906,7 @@
                       <a:r>
                         <a:rPr sz="900" b="0">
                           <a:solidFill>
-                            <a:srgbClr val="1E293B"/>
+                            <a:srgbClr val="0F2942"/>
                           </a:solidFill>
                           <a:latin typeface="맑은 고딕"/>
                         </a:rPr>
@@ -25956,7 +25956,7 @@
                       <a:r>
                         <a:rPr sz="900" b="0">
                           <a:solidFill>
-                            <a:srgbClr val="1E293B"/>
+                            <a:srgbClr val="0F2942"/>
                           </a:solidFill>
                           <a:latin typeface="맑은 고딕"/>
                         </a:rPr>
@@ -26008,7 +26008,7 @@
                       <a:r>
                         <a:rPr sz="900" b="1">
                           <a:solidFill>
-                            <a:srgbClr val="1E293B"/>
+                            <a:srgbClr val="0F2942"/>
                           </a:solidFill>
                           <a:latin typeface="맑은 고딕"/>
                         </a:rPr>
@@ -26058,7 +26058,7 @@
                       <a:r>
                         <a:rPr sz="900" b="1">
                           <a:solidFill>
-                            <a:srgbClr val="1E293B"/>
+                            <a:srgbClr val="0F2942"/>
                           </a:solidFill>
                           <a:latin typeface="맑은 고딕"/>
                         </a:rPr>
@@ -26108,7 +26108,7 @@
                       <a:r>
                         <a:rPr sz="900" b="0">
                           <a:solidFill>
-                            <a:srgbClr val="1E293B"/>
+                            <a:srgbClr val="0F2942"/>
                           </a:solidFill>
                           <a:latin typeface="맑은 고딕"/>
                         </a:rPr>
@@ -26158,7 +26158,7 @@
                       <a:r>
                         <a:rPr sz="900" b="0">
                           <a:solidFill>
-                            <a:srgbClr val="1E293B"/>
+                            <a:srgbClr val="0F2942"/>
                           </a:solidFill>
                           <a:latin typeface="맑은 고딕"/>
                         </a:rPr>
@@ -26208,7 +26208,7 @@
                       <a:r>
                         <a:rPr sz="900" b="0">
                           <a:solidFill>
-                            <a:srgbClr val="1E293B"/>
+                            <a:srgbClr val="0F2942"/>
                           </a:solidFill>
                           <a:latin typeface="맑은 고딕"/>
                         </a:rPr>
@@ -26260,7 +26260,7 @@
                       <a:r>
                         <a:rPr sz="900" b="1">
                           <a:solidFill>
-                            <a:srgbClr val="1E293B"/>
+                            <a:srgbClr val="0F2942"/>
                           </a:solidFill>
                           <a:latin typeface="맑은 고딕"/>
                         </a:rPr>
@@ -26310,7 +26310,7 @@
                       <a:r>
                         <a:rPr sz="900" b="1">
                           <a:solidFill>
-                            <a:srgbClr val="1E293B"/>
+                            <a:srgbClr val="0F2942"/>
                           </a:solidFill>
                           <a:latin typeface="맑은 고딕"/>
                         </a:rPr>
@@ -26360,7 +26360,7 @@
                       <a:r>
                         <a:rPr sz="900" b="0">
                           <a:solidFill>
-                            <a:srgbClr val="1E293B"/>
+                            <a:srgbClr val="0F2942"/>
                           </a:solidFill>
                           <a:latin typeface="맑은 고딕"/>
                         </a:rPr>
@@ -26410,7 +26410,7 @@
                       <a:r>
                         <a:rPr sz="900" b="0">
                           <a:solidFill>
-                            <a:srgbClr val="1E293B"/>
+                            <a:srgbClr val="0F2942"/>
                           </a:solidFill>
                           <a:latin typeface="맑은 고딕"/>
                         </a:rPr>
@@ -26460,7 +26460,7 @@
                       <a:r>
                         <a:rPr sz="900" b="0">
                           <a:solidFill>
-                            <a:srgbClr val="1E293B"/>
+                            <a:srgbClr val="0F2942"/>
                           </a:solidFill>
                           <a:latin typeface="맑은 고딕"/>
                         </a:rPr>
@@ -26512,7 +26512,7 @@
                       <a:r>
                         <a:rPr sz="900" b="1">
                           <a:solidFill>
-                            <a:srgbClr val="1E293B"/>
+                            <a:srgbClr val="0F2942"/>
                           </a:solidFill>
                           <a:latin typeface="맑은 고딕"/>
                         </a:rPr>
@@ -26562,7 +26562,7 @@
                       <a:r>
                         <a:rPr sz="900" b="1">
                           <a:solidFill>
-                            <a:srgbClr val="1E293B"/>
+                            <a:srgbClr val="0F2942"/>
                           </a:solidFill>
                           <a:latin typeface="맑은 고딕"/>
                         </a:rPr>
@@ -26612,7 +26612,7 @@
                       <a:r>
                         <a:rPr sz="900" b="0">
                           <a:solidFill>
-                            <a:srgbClr val="1E293B"/>
+                            <a:srgbClr val="0F2942"/>
                           </a:solidFill>
                           <a:latin typeface="맑은 고딕"/>
                         </a:rPr>
@@ -26662,7 +26662,7 @@
                       <a:r>
                         <a:rPr sz="900" b="0">
                           <a:solidFill>
-                            <a:srgbClr val="1E293B"/>
+                            <a:srgbClr val="0F2942"/>
                           </a:solidFill>
                           <a:latin typeface="맑은 고딕"/>
                         </a:rPr>
@@ -26712,7 +26712,7 @@
                       <a:r>
                         <a:rPr sz="900" b="0">
                           <a:solidFill>
-                            <a:srgbClr val="1E293B"/>
+                            <a:srgbClr val="0F2942"/>
                           </a:solidFill>
                           <a:latin typeface="맑은 고딕"/>
                         </a:rPr>
@@ -26764,7 +26764,7 @@
                       <a:r>
                         <a:rPr sz="900" b="1">
                           <a:solidFill>
-                            <a:srgbClr val="1E293B"/>
+                            <a:srgbClr val="0F2942"/>
                           </a:solidFill>
                           <a:latin typeface="맑은 고딕"/>
                         </a:rPr>
@@ -26814,7 +26814,7 @@
                       <a:r>
                         <a:rPr sz="900" b="1">
                           <a:solidFill>
-                            <a:srgbClr val="1E293B"/>
+                            <a:srgbClr val="0F2942"/>
                           </a:solidFill>
                           <a:latin typeface="맑은 고딕"/>
                         </a:rPr>
@@ -26864,7 +26864,7 @@
                       <a:r>
                         <a:rPr sz="900" b="0">
                           <a:solidFill>
-                            <a:srgbClr val="1E293B"/>
+                            <a:srgbClr val="0F2942"/>
                           </a:solidFill>
                           <a:latin typeface="맑은 고딕"/>
                         </a:rPr>
@@ -26914,7 +26914,7 @@
                       <a:r>
                         <a:rPr sz="900" b="0">
                           <a:solidFill>
-                            <a:srgbClr val="1E293B"/>
+                            <a:srgbClr val="0F2942"/>
                           </a:solidFill>
                           <a:latin typeface="맑은 고딕"/>
                         </a:rPr>
@@ -26964,7 +26964,7 @@
                       <a:r>
                         <a:rPr sz="900" b="0">
                           <a:solidFill>
-                            <a:srgbClr val="1E293B"/>
+                            <a:srgbClr val="0F2942"/>
                           </a:solidFill>
                           <a:latin typeface="맑은 고딕"/>
                         </a:rPr>
@@ -27218,7 +27218,7 @@
             <a:r>
               <a:rPr sz="950" b="0">
                 <a:solidFill>
-                  <a:srgbClr val="1E293B"/>
+                  <a:srgbClr val="0F2942"/>
                 </a:solidFill>
                 <a:latin typeface="맑은 고딕"/>
               </a:rPr>
@@ -27237,7 +27237,7 @@
             <a:r>
               <a:rPr sz="950" b="0">
                 <a:solidFill>
-                  <a:srgbClr val="1E293B"/>
+                  <a:srgbClr val="0F2942"/>
                 </a:solidFill>
                 <a:latin typeface="맑은 고딕"/>
               </a:rPr>
@@ -27256,7 +27256,7 @@
             <a:r>
               <a:rPr sz="950" b="0">
                 <a:solidFill>
-                  <a:srgbClr val="1E293B"/>
+                  <a:srgbClr val="0F2942"/>
                 </a:solidFill>
                 <a:latin typeface="맑은 고딕"/>
               </a:rPr>
@@ -27480,11 +27480,11 @@
             <a:r>
               <a:rPr sz="919" b="0">
                 <a:solidFill>
-                  <a:srgbClr val="1E293B"/>
+                  <a:srgbClr val="0F2942"/>
                 </a:solidFill>
                 <a:latin typeface="맑은 고딕"/>
               </a:rPr>
-              <a:t>📁 syncguard_ai (프로젝트 루트)</a:t>
+              <a:t>📁 syncflow_ai (프로젝트 루트)</a:t>
             </a:r>
           </a:p>
           <a:p>
@@ -27499,7 +27499,7 @@
             <a:r>
               <a:rPr sz="919" b="0">
                 <a:solidFill>
-                  <a:srgbClr val="1E293B"/>
+                  <a:srgbClr val="0F2942"/>
                 </a:solidFill>
                 <a:latin typeface="맑은 고딕"/>
               </a:rPr>
@@ -27518,7 +27518,7 @@
             <a:r>
               <a:rPr sz="919" b="0">
                 <a:solidFill>
-                  <a:srgbClr val="1E293B"/>
+                  <a:srgbClr val="0F2942"/>
                 </a:solidFill>
                 <a:latin typeface="맑은 고딕"/>
               </a:rPr>
@@ -27537,7 +27537,7 @@
             <a:r>
               <a:rPr sz="919" b="0">
                 <a:solidFill>
-                  <a:srgbClr val="1E293B"/>
+                  <a:srgbClr val="0F2942"/>
                 </a:solidFill>
                 <a:latin typeface="맑은 고딕"/>
               </a:rPr>
@@ -27556,7 +27556,7 @@
             <a:r>
               <a:rPr sz="919" b="0">
                 <a:solidFill>
-                  <a:srgbClr val="1E293B"/>
+                  <a:srgbClr val="0F2942"/>
                 </a:solidFill>
                 <a:latin typeface="맑은 고딕"/>
               </a:rPr>
@@ -27575,7 +27575,7 @@
             <a:r>
               <a:rPr sz="919" b="0">
                 <a:solidFill>
-                  <a:srgbClr val="1E293B"/>
+                  <a:srgbClr val="0F2942"/>
                 </a:solidFill>
                 <a:latin typeface="맑은 고딕"/>
               </a:rPr>
@@ -27594,7 +27594,7 @@
             <a:r>
               <a:rPr sz="919" b="0">
                 <a:solidFill>
-                  <a:srgbClr val="1E293B"/>
+                  <a:srgbClr val="0F2942"/>
                 </a:solidFill>
                 <a:latin typeface="맑은 고딕"/>
               </a:rPr>
@@ -27613,7 +27613,7 @@
             <a:r>
               <a:rPr sz="919" b="0">
                 <a:solidFill>
-                  <a:srgbClr val="1E293B"/>
+                  <a:srgbClr val="0F2942"/>
                 </a:solidFill>
                 <a:latin typeface="맑은 고딕"/>
               </a:rPr>
@@ -27632,7 +27632,7 @@
             <a:r>
               <a:rPr sz="919" b="0">
                 <a:solidFill>
-                  <a:srgbClr val="1E293B"/>
+                  <a:srgbClr val="0F2942"/>
                 </a:solidFill>
                 <a:latin typeface="맑은 고딕"/>
               </a:rPr>
@@ -27651,7 +27651,7 @@
             <a:r>
               <a:rPr sz="919" b="0">
                 <a:solidFill>
-                  <a:srgbClr val="1E293B"/>
+                  <a:srgbClr val="0F2942"/>
                 </a:solidFill>
                 <a:latin typeface="맑은 고딕"/>
               </a:rPr>
@@ -27670,7 +27670,7 @@
             <a:r>
               <a:rPr sz="919" b="0">
                 <a:solidFill>
-                  <a:srgbClr val="1E293B"/>
+                  <a:srgbClr val="0F2942"/>
                 </a:solidFill>
                 <a:latin typeface="맑은 고딕"/>
               </a:rPr>
@@ -27689,7 +27689,7 @@
             <a:r>
               <a:rPr sz="919" b="0">
                 <a:solidFill>
-                  <a:srgbClr val="1E293B"/>
+                  <a:srgbClr val="0F2942"/>
                 </a:solidFill>
                 <a:latin typeface="맑은 고딕"/>
               </a:rPr>
@@ -27708,11 +27708,11 @@
             <a:r>
               <a:rPr sz="919" b="0">
                 <a:solidFill>
-                  <a:srgbClr val="1E293B"/>
+                  <a:srgbClr val="0F2942"/>
                 </a:solidFill>
                 <a:latin typeface="맑은 고딕"/>
               </a:rPr>
-              <a:t> │    └── 📄 규칙사전(010), 프롬프트명세(020), ProductLab연계(030)</a:t>
+              <a:t> │    └── 📄 규칙사전(010), 프롬프트명세(020), PLM-Nexus연계(030)</a:t>
             </a:r>
           </a:p>
           <a:p>
@@ -27727,7 +27727,7 @@
             <a:r>
               <a:rPr sz="919" b="0">
                 <a:solidFill>
-                  <a:srgbClr val="1E293B"/>
+                  <a:srgbClr val="0F2942"/>
                 </a:solidFill>
                 <a:latin typeface="맑은 고딕"/>
               </a:rPr>
@@ -27746,7 +27746,7 @@
             <a:r>
               <a:rPr sz="919" b="0">
                 <a:solidFill>
-                  <a:srgbClr val="1E293B"/>
+                  <a:srgbClr val="0F2942"/>
                 </a:solidFill>
                 <a:latin typeface="맑은 고딕"/>
               </a:rPr>
@@ -27765,7 +27765,7 @@
             <a:r>
               <a:rPr sz="919" b="0">
                 <a:solidFill>
-                  <a:srgbClr val="1E293B"/>
+                  <a:srgbClr val="0F2942"/>
                 </a:solidFill>
                 <a:latin typeface="맑은 고딕"/>
               </a:rPr>
@@ -27784,7 +27784,7 @@
             <a:r>
               <a:rPr sz="919" b="0">
                 <a:solidFill>
-                  <a:srgbClr val="1E293B"/>
+                  <a:srgbClr val="0F2942"/>
                 </a:solidFill>
                 <a:latin typeface="맑은 고딕"/>
               </a:rPr>
@@ -27803,7 +27803,7 @@
             <a:r>
               <a:rPr sz="919" b="0">
                 <a:solidFill>
-                  <a:srgbClr val="1E293B"/>
+                  <a:srgbClr val="0F2942"/>
                 </a:solidFill>
                 <a:latin typeface="맑은 고딕"/>
               </a:rPr>
@@ -27993,7 +27993,7 @@
                 </a:solidFill>
                 <a:latin typeface="맑은 고딕"/>
               </a:rPr>
-              <a:t>화장품 신제품 시안과 사내 인프라 정보를 보호하기 위해 3단계 보안 등급을 적용하고, 종료 시 28종 전수를 검증·인계합니다.</a:t>
+              <a:t>전장부품 신제품 계약·도서과 사내 인프라 정보를 보호하기 위해 3단계 보안 등급을 적용하고, 종료 시 28종 전수를 검증·인계합니다.</a:t>
             </a:r>
           </a:p>
         </p:txBody>
@@ -28121,7 +28121,7 @@
                 </a:solidFill>
                 <a:latin typeface="맑은 고딕"/>
               </a:rPr>
-              <a:t>한빛글로벌 SyncGuard AI 시스템 구축  |  문서관리 계획서</a:t>
+              <a:t>한빛글로벌 SyncFlow AI 시스템 구축  |  문서관리 계획서</a:t>
             </a:r>
           </a:p>
         </p:txBody>
@@ -28554,11 +28554,11 @@
                       <a:r>
                         <a:rPr sz="919" b="0">
                           <a:solidFill>
-                            <a:srgbClr val="1E293B"/>
+                            <a:srgbClr val="0F2942"/>
                           </a:solidFill>
                           <a:latin typeface="맑은 고딕"/>
                         </a:rPr>
-                        <a:t>• 미출시 신제품 광고 시안/영상 원본</a:t>
+                        <a:t>• 미출시 신제품 구매계약 계약·도서/영상 원본</a:t>
                       </a:r>
                     </a:p>
                     <a:p>
@@ -28573,7 +28573,7 @@
                       <a:r>
                         <a:rPr sz="919" b="0">
                           <a:solidFill>
-                            <a:srgbClr val="1E293B"/>
+                            <a:srgbClr val="0F2942"/>
                           </a:solidFill>
                           <a:latin typeface="맑은 고딕"/>
                         </a:rPr>
@@ -28623,7 +28623,7 @@
                       <a:r>
                         <a:rPr sz="919" b="0">
                           <a:solidFill>
-                            <a:srgbClr val="1E293B"/>
+                            <a:srgbClr val="0F2942"/>
                           </a:solidFill>
                           <a:latin typeface="맑은 고딕"/>
                         </a:rPr>
@@ -28642,7 +28642,7 @@
                       <a:r>
                         <a:rPr sz="919" b="0">
                           <a:solidFill>
-                            <a:srgbClr val="1E293B"/>
+                            <a:srgbClr val="0F2942"/>
                           </a:solidFill>
                           <a:latin typeface="맑은 고딕"/>
                         </a:rPr>
@@ -28692,7 +28692,7 @@
                       <a:r>
                         <a:rPr sz="919" b="0">
                           <a:solidFill>
-                            <a:srgbClr val="1E293B"/>
+                            <a:srgbClr val="0F2942"/>
                           </a:solidFill>
                           <a:latin typeface="맑은 고딕"/>
                         </a:rPr>
@@ -28711,7 +28711,7 @@
                       <a:r>
                         <a:rPr sz="919" b="0">
                           <a:solidFill>
-                            <a:srgbClr val="1E293B"/>
+                            <a:srgbClr val="0F2942"/>
                           </a:solidFill>
                           <a:latin typeface="맑은 고딕"/>
                         </a:rPr>
@@ -28761,7 +28761,7 @@
                       <a:r>
                         <a:rPr sz="919" b="0">
                           <a:solidFill>
-                            <a:srgbClr val="1E293B"/>
+                            <a:srgbClr val="0F2942"/>
                           </a:solidFill>
                           <a:latin typeface="맑은 고딕"/>
                         </a:rPr>
@@ -28780,7 +28780,7 @@
                       <a:r>
                         <a:rPr sz="919" b="0">
                           <a:solidFill>
-                            <a:srgbClr val="1E293B"/>
+                            <a:srgbClr val="0F2942"/>
                           </a:solidFill>
                           <a:latin typeface="맑은 고딕"/>
                         </a:rPr>
@@ -28832,7 +28832,7 @@
                       <a:r>
                         <a:rPr sz="919" b="1">
                           <a:solidFill>
-                            <a:srgbClr val="1E293B"/>
+                            <a:srgbClr val="0F2942"/>
                           </a:solidFill>
                           <a:latin typeface="맑은 고딕"/>
                         </a:rPr>
@@ -28882,7 +28882,7 @@
                       <a:r>
                         <a:rPr sz="919" b="0">
                           <a:solidFill>
-                            <a:srgbClr val="1E293B"/>
+                            <a:srgbClr val="0F2942"/>
                           </a:solidFill>
                           <a:latin typeface="맑은 고딕"/>
                         </a:rPr>
@@ -28901,7 +28901,7 @@
                       <a:r>
                         <a:rPr sz="919" b="0">
                           <a:solidFill>
-                            <a:srgbClr val="1E293B"/>
+                            <a:srgbClr val="0F2942"/>
                           </a:solidFill>
                           <a:latin typeface="맑은 고딕"/>
                         </a:rPr>
@@ -28951,7 +28951,7 @@
                       <a:r>
                         <a:rPr sz="919" b="0">
                           <a:solidFill>
-                            <a:srgbClr val="1E293B"/>
+                            <a:srgbClr val="0F2942"/>
                           </a:solidFill>
                           <a:latin typeface="맑은 고딕"/>
                         </a:rPr>
@@ -28970,7 +28970,7 @@
                       <a:r>
                         <a:rPr sz="919" b="0">
                           <a:solidFill>
-                            <a:srgbClr val="1E293B"/>
+                            <a:srgbClr val="0F2942"/>
                           </a:solidFill>
                           <a:latin typeface="맑은 고딕"/>
                         </a:rPr>
@@ -29020,7 +29020,7 @@
                       <a:r>
                         <a:rPr sz="919" b="0">
                           <a:solidFill>
-                            <a:srgbClr val="1E293B"/>
+                            <a:srgbClr val="0F2942"/>
                           </a:solidFill>
                           <a:latin typeface="맑은 고딕"/>
                         </a:rPr>
@@ -29039,7 +29039,7 @@
                       <a:r>
                         <a:rPr sz="919" b="0">
                           <a:solidFill>
-                            <a:srgbClr val="1E293B"/>
+                            <a:srgbClr val="0F2942"/>
                           </a:solidFill>
                           <a:latin typeface="맑은 고딕"/>
                         </a:rPr>
@@ -29089,7 +29089,7 @@
                       <a:r>
                         <a:rPr sz="919" b="0">
                           <a:solidFill>
-                            <a:srgbClr val="1E293B"/>
+                            <a:srgbClr val="0F2942"/>
                           </a:solidFill>
                           <a:latin typeface="맑은 고딕"/>
                         </a:rPr>
@@ -29108,7 +29108,7 @@
                       <a:r>
                         <a:rPr sz="919" b="0">
                           <a:solidFill>
-                            <a:srgbClr val="1E293B"/>
+                            <a:srgbClr val="0F2942"/>
                           </a:solidFill>
                           <a:latin typeface="맑은 고딕"/>
                         </a:rPr>
@@ -29160,7 +29160,7 @@
                       <a:r>
                         <a:rPr sz="919" b="1">
                           <a:solidFill>
-                            <a:srgbClr val="1E293B"/>
+                            <a:srgbClr val="0F2942"/>
                           </a:solidFill>
                           <a:latin typeface="맑은 고딕"/>
                         </a:rPr>
@@ -29210,7 +29210,7 @@
                       <a:r>
                         <a:rPr sz="919" b="0">
                           <a:solidFill>
-                            <a:srgbClr val="1E293B"/>
+                            <a:srgbClr val="0F2942"/>
                           </a:solidFill>
                           <a:latin typeface="맑은 고딕"/>
                         </a:rPr>
@@ -29229,11 +29229,11 @@
                       <a:r>
                         <a:rPr sz="919" b="0">
                           <a:solidFill>
-                            <a:srgbClr val="1E293B"/>
+                            <a:srgbClr val="0F2942"/>
                           </a:solidFill>
                           <a:latin typeface="맑은 고딕"/>
                         </a:rPr>
-                        <a:t>• 공개 법령 가이드라인(식약처 고시 원문)</a:t>
+                        <a:t>• 공개 법령 가이드라인(공정위·표준원 고시 원문)</a:t>
                       </a:r>
                     </a:p>
                   </a:txBody>
@@ -29279,7 +29279,7 @@
                       <a:r>
                         <a:rPr sz="919" b="0">
                           <a:solidFill>
-                            <a:srgbClr val="1E293B"/>
+                            <a:srgbClr val="0F2942"/>
                           </a:solidFill>
                           <a:latin typeface="맑은 고딕"/>
                         </a:rPr>
@@ -29298,7 +29298,7 @@
                       <a:r>
                         <a:rPr sz="919" b="0">
                           <a:solidFill>
-                            <a:srgbClr val="1E293B"/>
+                            <a:srgbClr val="0F2942"/>
                           </a:solidFill>
                           <a:latin typeface="맑은 고딕"/>
                         </a:rPr>
@@ -29348,7 +29348,7 @@
                       <a:r>
                         <a:rPr sz="919" b="0">
                           <a:solidFill>
-                            <a:srgbClr val="1E293B"/>
+                            <a:srgbClr val="0F2942"/>
                           </a:solidFill>
                           <a:latin typeface="맑은 고딕"/>
                         </a:rPr>
@@ -29367,7 +29367,7 @@
                       <a:r>
                         <a:rPr sz="919" b="0">
                           <a:solidFill>
-                            <a:srgbClr val="1E293B"/>
+                            <a:srgbClr val="0F2942"/>
                           </a:solidFill>
                           <a:latin typeface="맑은 고딕"/>
                         </a:rPr>
@@ -29417,7 +29417,7 @@
                       <a:r>
                         <a:rPr sz="919" b="0">
                           <a:solidFill>
-                            <a:srgbClr val="1E293B"/>
+                            <a:srgbClr val="0F2942"/>
                           </a:solidFill>
                           <a:latin typeface="맑은 고딕"/>
                         </a:rPr>
@@ -29436,7 +29436,7 @@
                       <a:r>
                         <a:rPr sz="919" b="0">
                           <a:solidFill>
-                            <a:srgbClr val="1E293B"/>
+                            <a:srgbClr val="0F2942"/>
                           </a:solidFill>
                           <a:latin typeface="맑은 고딕"/>
                         </a:rPr>
@@ -29690,7 +29690,7 @@
             <a:r>
               <a:rPr sz="950" b="0">
                 <a:solidFill>
-                  <a:srgbClr val="1E293B"/>
+                  <a:srgbClr val="0F2942"/>
                 </a:solidFill>
                 <a:latin typeface="맑은 고딕"/>
               </a:rPr>
@@ -29709,7 +29709,7 @@
             <a:r>
               <a:rPr sz="950" b="0">
                 <a:solidFill>
-                  <a:srgbClr val="1E293B"/>
+                  <a:srgbClr val="0F2942"/>
                 </a:solidFill>
                 <a:latin typeface="맑은 고딕"/>
               </a:rPr>
@@ -29933,11 +29933,11 @@
             <a:r>
               <a:rPr sz="950" b="0">
                 <a:solidFill>
-                  <a:srgbClr val="1E293B"/>
+                  <a:srgbClr val="0F2942"/>
                 </a:solidFill>
                 <a:latin typeface="맑은 고딕"/>
               </a:rPr>
-              <a:t>• 운영자매뉴얼(IMP_060) 및 사용자매뉴얼(IMP_050) 기반 IT운영팀(4명)·RA 실무자(18명) 기술 이전 교육 실시</a:t>
+              <a:t>• 운영자매뉴얼(IMP_060) 및 사용자매뉴얼(IMP_050) 기반 IT운영팀(4명)·QA 실무자(18명) 기술 이전 교육 실시</a:t>
             </a:r>
           </a:p>
           <a:p>
@@ -29952,7 +29952,7 @@
             <a:r>
               <a:rPr sz="950" b="0">
                 <a:solidFill>
-                  <a:srgbClr val="1E293B"/>
+                  <a:srgbClr val="0F2942"/>
                 </a:solidFill>
                 <a:latin typeface="맑은 고딕"/>
               </a:rPr>
@@ -30176,11 +30176,11 @@
             <a:r>
               <a:rPr sz="950" b="0">
                 <a:solidFill>
-                  <a:srgbClr val="1E293B"/>
+                  <a:srgbClr val="0F2942"/>
                 </a:solidFill>
                 <a:latin typeface="맑은 고딕"/>
               </a:rPr>
-              <a:t>• 발주사 지정 저장소(구글 드라이브 및 사내 문서함)에 최종 산출물 패키지 납품 완료</a:t>
+              <a:t>• 발주사 지정 저장소(구글 드라이브 및 사내 문서함)에 최종 산출물 도면도면패키지 납품 완료</a:t>
             </a:r>
           </a:p>
           <a:p>
@@ -30195,7 +30195,7 @@
             <a:r>
               <a:rPr sz="950" b="0">
                 <a:solidFill>
-                  <a:srgbClr val="1E293B"/>
+                  <a:srgbClr val="0F2942"/>
                 </a:solidFill>
                 <a:latin typeface="맑은 고딕"/>
               </a:rPr>
